--- a/BasketShield_AI_Presentation.pptx
+++ b/BasketShield_AI_Presentation.pptx
@@ -3191,8 +3191,8 @@
         </p:nvSpPr>
         <p:spPr>
           <a:xfrm>
-            <a:off x="1280160" y="1188720"/>
-            <a:ext cx="3931920" cy="329184"/>
+            <a:off x="1371600" y="1280160"/>
+            <a:ext cx="3291840" cy="329184"/>
           </a:xfrm>
           <a:prstGeom prst="roundRect">
             <a:avLst/>
@@ -3225,7 +3225,7 @@
           <a:lstStyle/>
           <a:p>
             <a:pPr algn="ctr">
-              <a:defRPr sz="900" b="1">
+              <a:defRPr sz="850" b="1">
                 <a:solidFill>
                   <a:srgbClr val="2563EB"/>
                 </a:solidFill>
@@ -3233,7 +3233,7 @@
               </a:defRPr>
             </a:pPr>
             <a:r>
-              <a:t>OPERATIONS RESEARCH &amp; SUPPLY CHAIN INTELLIGENCE</a:t>
+              <a:t>SUPPLY CHAIN RESILIENCE • HACKATHON PITCH</a:t>
             </a:r>
           </a:p>
         </p:txBody>
@@ -3246,8 +3246,8 @@
         </p:nvSpPr>
         <p:spPr>
           <a:xfrm>
-            <a:off x="1280160" y="1691640"/>
-            <a:ext cx="9601200" cy="914400"/>
+            <a:off x="1371600" y="1783080"/>
+            <a:ext cx="9418320" cy="914400"/>
           </a:xfrm>
           <a:prstGeom prst="rect">
             <a:avLst/>
@@ -3282,8 +3282,8 @@
         </p:nvSpPr>
         <p:spPr>
           <a:xfrm>
-            <a:off x="1280160" y="2606040"/>
-            <a:ext cx="9601200" cy="731520"/>
+            <a:off x="1371600" y="2697480"/>
+            <a:ext cx="9418320" cy="594360"/>
           </a:xfrm>
           <a:prstGeom prst="rect">
             <a:avLst/>
@@ -3297,7 +3297,7 @@
           <a:lstStyle/>
           <a:p>
             <a:pPr>
-              <a:defRPr sz="1600" b="1">
+              <a:defRPr sz="1500" b="1">
                 <a:solidFill>
                   <a:srgbClr val="334155"/>
                 </a:solidFill>
@@ -3305,7 +3305,7 @@
               </a:defRPr>
             </a:pPr>
             <a:r>
-              <a:t>Prescriptive Unit Economics Defense Against Geopolitical Maritime Chokepoints and the 2026 AI Memory Crunch</a:t>
+              <a:t>Protecting Everyday Consumer Prices &amp; Manufacturing Costs from Global Shipping Shocks &amp; the AI Chip Crunch</a:t>
             </a:r>
           </a:p>
         </p:txBody>
@@ -3318,8 +3318,8 @@
         </p:nvSpPr>
         <p:spPr>
           <a:xfrm>
-            <a:off x="1280160" y="3383280"/>
-            <a:ext cx="3063240" cy="1280160"/>
+            <a:off x="1371600" y="3474720"/>
+            <a:ext cx="3017520" cy="1234440"/>
           </a:xfrm>
           <a:prstGeom prst="roundRect">
             <a:avLst/>
@@ -3363,8 +3363,8 @@
         </p:nvSpPr>
         <p:spPr>
           <a:xfrm>
-            <a:off x="1444752" y="3520440"/>
-            <a:ext cx="2743200" cy="1005840"/>
+            <a:off x="1554480" y="3611880"/>
+            <a:ext cx="2651760" cy="960120"/>
           </a:xfrm>
           <a:prstGeom prst="rect">
             <a:avLst/>
@@ -3378,7 +3378,7 @@
           <a:lstStyle/>
           <a:p>
             <a:pPr>
-              <a:defRPr sz="1150" b="1">
+              <a:defRPr sz="1100" b="1">
                 <a:solidFill>
                   <a:srgbClr val="2563EB"/>
                 </a:solidFill>
@@ -3386,12 +3386,15 @@
               </a:defRPr>
             </a:pPr>
             <a:r>
-              <a:t>6,000 Multi-Sector SKUs</a:t>
+              <a:t>6,000 Catalog Products</a:t>
             </a:r>
           </a:p>
           <a:p>
             <a:pPr>
-              <a:defRPr sz="950">
+              <a:spcBef>
+                <a:spcPts val="400"/>
+              </a:spcBef>
+              <a:defRPr sz="919">
                 <a:solidFill>
                   <a:srgbClr val="475569"/>
                 </a:solidFill>
@@ -3399,7 +3402,7 @@
               </a:defRPr>
             </a:pPr>
             <a:r>
-              <a:t>FMCG Staples, High-Tech Electronics &amp; Tesla EV Skateboards</a:t>
+              <a:t>Tested across Groceries (Coffee, Oils), Electronics (iPhones, GPUs), and Tesla EVs.</a:t>
             </a:r>
           </a:p>
         </p:txBody>
@@ -3412,8 +3415,8 @@
         </p:nvSpPr>
         <p:spPr>
           <a:xfrm>
-            <a:off x="4572000" y="3383280"/>
-            <a:ext cx="3063240" cy="1280160"/>
+            <a:off x="4617720" y="3474720"/>
+            <a:ext cx="3017520" cy="1234440"/>
           </a:xfrm>
           <a:prstGeom prst="roundRect">
             <a:avLst/>
@@ -3457,8 +3460,8 @@
         </p:nvSpPr>
         <p:spPr>
           <a:xfrm>
-            <a:off x="4736592" y="3520440"/>
-            <a:ext cx="2743200" cy="1005840"/>
+            <a:off x="4800600" y="3611880"/>
+            <a:ext cx="2651760" cy="960120"/>
           </a:xfrm>
           <a:prstGeom prst="rect">
             <a:avLst/>
@@ -3472,20 +3475,23 @@
           <a:lstStyle/>
           <a:p>
             <a:pPr>
-              <a:defRPr sz="1150" b="1">
-                <a:solidFill>
-                  <a:srgbClr val="2563EB"/>
-                </a:solidFill>
-                <a:latin typeface="Segoe UI"/>
-              </a:defRPr>
-            </a:pPr>
-            <a:r>
-              <a:t>Google OR-Tools MILP</a:t>
+              <a:defRPr sz="1100" b="1">
+                <a:solidFill>
+                  <a:srgbClr val="0D9488"/>
+                </a:solidFill>
+                <a:latin typeface="Segoe UI"/>
+              </a:defRPr>
+            </a:pPr>
+            <a:r>
+              <a:t>Sub-15ms AI Optimization</a:t>
             </a:r>
           </a:p>
           <a:p>
             <a:pPr>
-              <a:defRPr sz="950">
+              <a:spcBef>
+                <a:spcPts val="400"/>
+              </a:spcBef>
+              <a:defRPr sz="919">
                 <a:solidFill>
                   <a:srgbClr val="475569"/>
                 </a:solidFill>
@@ -3493,7 +3499,7 @@
               </a:defRPr>
             </a:pPr>
             <a:r>
-              <a:t>Sub-15ms deterministic optimization with Big-M binary supplier gating</a:t>
+              <a:t>Replaces weeks of manual supplier calls with instant Google OR-Tools math solving.</a:t>
             </a:r>
           </a:p>
         </p:txBody>
@@ -3506,8 +3512,8 @@
         </p:nvSpPr>
         <p:spPr>
           <a:xfrm>
-            <a:off x="7863840" y="3383280"/>
-            <a:ext cx="3063240" cy="1280160"/>
+            <a:off x="7863840" y="3474720"/>
+            <a:ext cx="3017520" cy="1234440"/>
           </a:xfrm>
           <a:prstGeom prst="roundRect">
             <a:avLst/>
@@ -3551,8 +3557,8 @@
         </p:nvSpPr>
         <p:spPr>
           <a:xfrm>
-            <a:off x="8028432" y="3520440"/>
-            <a:ext cx="2743200" cy="1005840"/>
+            <a:off x="8046720" y="3611880"/>
+            <a:ext cx="2651760" cy="960120"/>
           </a:xfrm>
           <a:prstGeom prst="rect">
             <a:avLst/>
@@ -3566,7 +3572,7 @@
           <a:lstStyle/>
           <a:p>
             <a:pPr>
-              <a:defRPr sz="1150" b="1">
+              <a:defRPr sz="1100" b="1">
                 <a:solidFill>
                   <a:srgbClr val="2563EB"/>
                 </a:solidFill>
@@ -3574,12 +3580,15 @@
               </a:defRPr>
             </a:pPr>
             <a:r>
-              <a:t>Up to 85% Price Defense</a:t>
+              <a:t>Up to 85% Price Shock Absorbed</a:t>
             </a:r>
           </a:p>
           <a:p>
             <a:pPr>
-              <a:defRPr sz="950">
+              <a:spcBef>
+                <a:spcPts val="400"/>
+              </a:spcBef>
+              <a:defRPr sz="919">
                 <a:solidFill>
                   <a:srgbClr val="475569"/>
                 </a:solidFill>
@@ -3587,7 +3596,7 @@
               </a:defRPr>
             </a:pPr>
             <a:r>
-              <a:t>Prevents supermarket checkout inflation and device MSRP surges</a:t>
+              <a:t>Keeps grocery store prices steady instead of passing huge cost hikes to shoppers.</a:t>
             </a:r>
           </a:p>
         </p:txBody>
@@ -3600,8 +3609,8 @@
         </p:nvSpPr>
         <p:spPr>
           <a:xfrm>
-            <a:off x="1280160" y="4983480"/>
-            <a:ext cx="9601200" cy="548640"/>
+            <a:off x="1371600" y="4983480"/>
+            <a:ext cx="9418320" cy="594360"/>
           </a:xfrm>
           <a:prstGeom prst="rect">
             <a:avLst/>
@@ -3615,7 +3624,7 @@
           <a:lstStyle/>
           <a:p>
             <a:pPr>
-              <a:defRPr sz="1300" b="1">
+              <a:defRPr sz="1250" b="1">
                 <a:solidFill>
                   <a:srgbClr val="0F172A"/>
                 </a:solidFill>
@@ -3628,7 +3637,7 @@
           </a:p>
           <a:p>
             <a:pPr>
-              <a:defRPr sz="1000">
+              <a:defRPr sz="950">
                 <a:solidFill>
                   <a:srgbClr val="64748B"/>
                 </a:solidFill>
@@ -3636,7 +3645,7 @@
               </a:defRPr>
             </a:pPr>
             <a:r>
-              <a:t>Open-Source Repository: github.com/lazyshrey/basketshield  •  Peer-Audited Research Paper Included</a:t>
+              <a:t>Open Source on GitHub: github.com/lazyshrey/basketshield  •  Includes Research Paper &amp; Benchmark Suite</a:t>
             </a:r>
           </a:p>
         </p:txBody>
@@ -3704,14 +3713,69 @@
       </p:sp>
       <p:sp>
         <p:nvSpPr>
-          <p:cNvPr id="3" name="TextBox 2"/>
+          <p:cNvPr id="3" name="Rounded Rectangle 2"/>
+          <p:cNvSpPr/>
+          <p:nvPr/>
+        </p:nvSpPr>
+        <p:spPr>
+          <a:xfrm>
+            <a:off x="731520" y="384048"/>
+            <a:ext cx="2926080" cy="292608"/>
+          </a:xfrm>
+          <a:prstGeom prst="roundRect">
+            <a:avLst/>
+          </a:prstGeom>
+          <a:solidFill>
+            <a:srgbClr val="EFF6FF"/>
+          </a:solidFill>
+          <a:ln w="12700">
+            <a:solidFill>
+              <a:srgbClr val="2563EB"/>
+            </a:solidFill>
+          </a:ln>
+        </p:spPr>
+        <p:style>
+          <a:lnRef idx="1">
+            <a:schemeClr val="accent1"/>
+          </a:lnRef>
+          <a:fillRef idx="3">
+            <a:schemeClr val="accent1"/>
+          </a:fillRef>
+          <a:effectRef idx="2">
+            <a:schemeClr val="accent1"/>
+          </a:effectRef>
+          <a:fontRef idx="minor">
+            <a:schemeClr val="lt1"/>
+          </a:fontRef>
+        </p:style>
+        <p:txBody>
+          <a:bodyPr rtlCol="0" anchor="ctr" lIns="0" tIns="0" rIns="0" bIns="0"/>
+          <a:lstStyle/>
+          <a:p>
+            <a:pPr algn="ctr">
+              <a:defRPr sz="850" b="1">
+                <a:solidFill>
+                  <a:srgbClr val="2563EB"/>
+                </a:solidFill>
+                <a:latin typeface="Segoe UI"/>
+              </a:defRPr>
+            </a:pPr>
+            <a:r>
+              <a:t>01. THE PROBLEM</a:t>
+            </a:r>
+          </a:p>
+        </p:txBody>
+      </p:sp>
+      <p:sp>
+        <p:nvSpPr>
+          <p:cNvPr id="4" name="TextBox 3"/>
           <p:cNvSpPr txBox="1"/>
           <p:nvPr/>
         </p:nvSpPr>
         <p:spPr>
           <a:xfrm>
-            <a:off x="731520" y="411480"/>
-            <a:ext cx="10698480" cy="320040"/>
+            <a:off x="731520" y="749808"/>
+            <a:ext cx="10698480" cy="502920"/>
           </a:xfrm>
           <a:prstGeom prst="rect">
             <a:avLst/>
@@ -3725,29 +3789,29 @@
           <a:lstStyle/>
           <a:p>
             <a:pPr>
-              <a:defRPr sz="950" b="1">
-                <a:solidFill>
-                  <a:srgbClr val="2563EB"/>
-                </a:solidFill>
-                <a:latin typeface="Segoe UI"/>
-              </a:defRPr>
-            </a:pPr>
-            <a:r>
-              <a:t>01. MACRO CRISIS &amp; EMPIRICAL SHOCKS</a:t>
-            </a:r>
-          </a:p>
-        </p:txBody>
-      </p:sp>
-      <p:sp>
-        <p:nvSpPr>
-          <p:cNvPr id="4" name="TextBox 3"/>
+              <a:defRPr sz="2100" b="1">
+                <a:solidFill>
+                  <a:srgbClr val="0F172A"/>
+                </a:solidFill>
+                <a:latin typeface="Segoe UI"/>
+              </a:defRPr>
+            </a:pPr>
+            <a:r>
+              <a:t>Why Are Everyday Prices Suddenly Skyrocketing?</a:t>
+            </a:r>
+          </a:p>
+        </p:txBody>
+      </p:sp>
+      <p:sp>
+        <p:nvSpPr>
+          <p:cNvPr id="5" name="TextBox 4"/>
           <p:cNvSpPr txBox="1"/>
           <p:nvPr/>
         </p:nvSpPr>
         <p:spPr>
           <a:xfrm>
-            <a:off x="731520" y="731520"/>
-            <a:ext cx="10698480" cy="548640"/>
+            <a:off x="731520" y="1298448"/>
+            <a:ext cx="10698480" cy="320040"/>
           </a:xfrm>
           <a:prstGeom prst="rect">
             <a:avLst/>
@@ -3761,42 +3825,6 @@
           <a:lstStyle/>
           <a:p>
             <a:pPr>
-              <a:defRPr sz="2200" b="1">
-                <a:solidFill>
-                  <a:srgbClr val="0F172A"/>
-                </a:solidFill>
-                <a:latin typeface="Segoe UI"/>
-              </a:defRPr>
-            </a:pPr>
-            <a:r>
-              <a:t>Compounding Disruption: Maritime Chokepoints &amp; The AI Memory Supercycle</a:t>
-            </a:r>
-          </a:p>
-        </p:txBody>
-      </p:sp>
-      <p:sp>
-        <p:nvSpPr>
-          <p:cNvPr id="5" name="TextBox 4"/>
-          <p:cNvSpPr txBox="1"/>
-          <p:nvPr/>
-        </p:nvSpPr>
-        <p:spPr>
-          <a:xfrm>
-            <a:off x="731520" y="1298448"/>
-            <a:ext cx="10698480" cy="365760"/>
-          </a:xfrm>
-          <a:prstGeom prst="rect">
-            <a:avLst/>
-          </a:prstGeom>
-          <a:noFill/>
-        </p:spPr>
-        <p:txBody>
-          <a:bodyPr wrap="square" lIns="0" tIns="0" rIns="0" bIns="0">
-            <a:spAutoFit/>
-          </a:bodyPr>
-          <a:lstStyle/>
-          <a:p>
-            <a:pPr>
               <a:defRPr sz="1100">
                 <a:solidFill>
                   <a:srgbClr val="64748B"/>
@@ -3805,7 +3833,7 @@
               </a:defRPr>
             </a:pPr>
             <a:r>
-              <a:t>Global supply shocks strike through physical component dependencies, inflating manufacturing costs.</a:t>
+              <a:t>Global events hit specific raw parts and shipping routes, creating massive price spikes.</a:t>
             </a:r>
           </a:p>
         </p:txBody>
@@ -3864,17 +3892,17 @@
         <p:spPr>
           <a:xfrm>
             <a:off x="914400" y="1965960"/>
-            <a:ext cx="3044952" cy="594360"/>
+            <a:ext cx="3044952" cy="548640"/>
           </a:xfrm>
           <a:prstGeom prst="roundRect">
             <a:avLst/>
           </a:prstGeom>
           <a:solidFill>
-            <a:srgbClr val="EFF6FF"/>
+            <a:srgbClr val="FFF1F2"/>
           </a:solidFill>
           <a:ln w="12700">
             <a:solidFill>
-              <a:srgbClr val="2563EB"/>
+              <a:srgbClr val="E11D48"/>
             </a:solidFill>
           </a:ln>
         </p:spPr>
@@ -3899,13 +3927,13 @@
             <a:pPr algn="ctr">
               <a:defRPr sz="1100" b="1">
                 <a:solidFill>
-                  <a:srgbClr val="2563EB"/>
-                </a:solidFill>
-                <a:latin typeface="Segoe UI"/>
-              </a:defRPr>
-            </a:pPr>
-            <a:r>
-              <a:t>+310% to +440% Freight Spike</a:t>
+                  <a:srgbClr val="E11D48"/>
+                </a:solidFill>
+                <a:latin typeface="Segoe UI"/>
+              </a:defRPr>
+            </a:pPr>
+            <a:r>
+              <a:t>+300% to +400% Freight Surge</a:t>
             </a:r>
           </a:p>
         </p:txBody>
@@ -3918,7 +3946,7 @@
         </p:nvSpPr>
         <p:spPr>
           <a:xfrm>
-            <a:off x="914400" y="2697480"/>
+            <a:off x="914400" y="2651760"/>
             <a:ext cx="3044952" cy="3383280"/>
           </a:xfrm>
           <a:prstGeom prst="rect">
@@ -3941,7 +3969,7 @@
               </a:defRPr>
             </a:pPr>
             <a:r>
-              <a:t>Bab el-Mandeb &amp; Red Sea</a:t>
+              <a:t>🚢 Ships Blocked in the Red Sea</a:t>
             </a:r>
           </a:p>
           <a:p>
@@ -3949,7 +3977,7 @@
               <a:spcBef>
                 <a:spcPts val="800"/>
               </a:spcBef>
-              <a:defRPr sz="1000">
+              <a:defRPr sz="950">
                 <a:solidFill>
                   <a:srgbClr val="475569"/>
                 </a:solidFill>
@@ -3957,7 +3985,12 @@
               </a:defRPr>
             </a:pPr>
             <a:r>
-              <a:t>Attacks in the Red Sea force container detours around the Cape of Good Hope, adding 10–14 days and 3,500 nautical miles for Europe-Asia lanes. Drewry World Container Index peaked above $5,900/FEU. Perishable food shipments (coffee, olive oil) face port demurrage and container deterioration.</a:t>
+              <a:t>When ships cannot pass through the Suez Canal, they take a 14-day detour around Africa.</a:t>
+            </a:r>
+            <a:br/>
+            <a:br/>
+            <a:r>
+              <a:t>Shipping a single container jumped from $1,400 to over $5,900. Everyday goods like coffee beans, tea, and cooking oils get delayed and rack up huge port fees.</a:t>
             </a:r>
           </a:p>
         </p:txBody>
@@ -4016,17 +4049,17 @@
         <p:spPr>
           <a:xfrm>
             <a:off x="4572000" y="1965960"/>
-            <a:ext cx="3044952" cy="594360"/>
+            <a:ext cx="3044952" cy="548640"/>
           </a:xfrm>
           <a:prstGeom prst="roundRect">
             <a:avLst/>
           </a:prstGeom>
           <a:solidFill>
-            <a:srgbClr val="EFF6FF"/>
+            <a:srgbClr val="FFF1F2"/>
           </a:solidFill>
           <a:ln w="12700">
             <a:solidFill>
-              <a:srgbClr val="2563EB"/>
+              <a:srgbClr val="E11D48"/>
             </a:solidFill>
           </a:ln>
         </p:spPr>
@@ -4051,13 +4084,13 @@
             <a:pPr algn="ctr">
               <a:defRPr sz="1100" b="1">
                 <a:solidFill>
-                  <a:srgbClr val="2563EB"/>
-                </a:solidFill>
-                <a:latin typeface="Segoe UI"/>
-              </a:defRPr>
-            </a:pPr>
-            <a:r>
-              <a:t>+24% to +35% Raw Metal Inflation</a:t>
+                  <a:srgbClr val="E11D48"/>
+                </a:solidFill>
+                <a:latin typeface="Segoe UI"/>
+              </a:defRPr>
+            </a:pPr>
+            <a:r>
+              <a:t>+30% Raw Packaging Cost</a:t>
             </a:r>
           </a:p>
         </p:txBody>
@@ -4070,7 +4103,7 @@
         </p:nvSpPr>
         <p:spPr>
           <a:xfrm>
-            <a:off x="4572000" y="2697480"/>
+            <a:off x="4572000" y="2651760"/>
             <a:ext cx="3044952" cy="3383280"/>
           </a:xfrm>
           <a:prstGeom prst="rect">
@@ -4093,7 +4126,7 @@
               </a:defRPr>
             </a:pPr>
             <a:r>
-              <a:t>Smelting Energy Surcharges</a:t>
+              <a:t>⚡ Energy Crisis at Smelting Plants</a:t>
             </a:r>
           </a:p>
           <a:p>
@@ -4101,7 +4134,7 @@
               <a:spcBef>
                 <a:spcPts val="800"/>
               </a:spcBef>
-              <a:defRPr sz="1000">
+              <a:defRPr sz="950">
                 <a:solidFill>
                   <a:srgbClr val="475569"/>
                 </a:solidFill>
@@ -4109,7 +4142,12 @@
               </a:defRPr>
             </a:pPr>
             <a:r>
-              <a:t>Natural gas and electricity volatility in Europe and the Middle East forced severe curtailments across energy-intensive primary aluminum smelters and glass annealing kilns. Raw packaging represents up to 45% of total grocery unit costs, creating an immediate margin squeeze.</a:t>
+              <a:t>Energy prices in Europe forced glass and aluminum factories to add huge energy surcharges.</a:t>
+            </a:r>
+            <a:br/>
+            <a:br/>
+            <a:r>
+              <a:t>For a can of soda or a glass coffee jar, the packaging alone makes up almost 45% of the total manufacturing cost.</a:t>
             </a:r>
           </a:p>
         </p:txBody>
@@ -4168,17 +4206,17 @@
         <p:spPr>
           <a:xfrm>
             <a:off x="8229600" y="1965960"/>
-            <a:ext cx="3044952" cy="594360"/>
+            <a:ext cx="3044952" cy="548640"/>
           </a:xfrm>
           <a:prstGeom prst="roundRect">
             <a:avLst/>
           </a:prstGeom>
           <a:solidFill>
-            <a:srgbClr val="FDF2F8"/>
+            <a:srgbClr val="FFF1F2"/>
           </a:solidFill>
           <a:ln w="12700">
             <a:solidFill>
-              <a:srgbClr val="DB2777"/>
+              <a:srgbClr val="E11D48"/>
             </a:solidFill>
           </a:ln>
         </p:spPr>
@@ -4203,13 +4241,13 @@
             <a:pPr algn="ctr">
               <a:defRPr sz="1100" b="1">
                 <a:solidFill>
-                  <a:srgbClr val="DB2777"/>
-                </a:solidFill>
-                <a:latin typeface="Segoe UI"/>
-              </a:defRPr>
-            </a:pPr>
-            <a:r>
-              <a:t>+58% to +72% DRAM Wafer Inflation</a:t>
+                  <a:srgbClr val="E11D48"/>
+                </a:solidFill>
+                <a:latin typeface="Segoe UI"/>
+              </a:defRPr>
+            </a:pPr>
+            <a:r>
+              <a:t>+60% to +70% RAM Price Jump</a:t>
             </a:r>
           </a:p>
         </p:txBody>
@@ -4222,7 +4260,7 @@
         </p:nvSpPr>
         <p:spPr>
           <a:xfrm>
-            <a:off x="8229600" y="2697480"/>
+            <a:off x="8229600" y="2651760"/>
             <a:ext cx="3044952" cy="3383280"/>
           </a:xfrm>
           <a:prstGeom prst="rect">
@@ -4245,7 +4283,7 @@
               </a:defRPr>
             </a:pPr>
             <a:r>
-              <a:t>2026 AI Memory Crunch</a:t>
+              <a:t>🧠 The 2026 AI Memory Squeeze</a:t>
             </a:r>
           </a:p>
           <a:p>
@@ -4253,7 +4291,7 @@
               <a:spcBef>
                 <a:spcPts val="800"/>
               </a:spcBef>
-              <a:defRPr sz="1000">
+              <a:defRPr sz="950">
                 <a:solidFill>
                   <a:srgbClr val="475569"/>
                 </a:solidFill>
@@ -4261,7 +4299,12 @@
               </a:defRPr>
             </a:pPr>
             <a:r>
-              <a:t>Hyperscalers consuming 80%+ of 1b-nm DRAM wafer allocation for HBM3e/HBM4 AI server clusters. High-bandwidth 3D TSV stacking introduces a ~3x wafer area penalty, starving wafer capacity for consumer LPDDR5X and DDR5. Silicon memory accounts for 18%–32% of electronic BOMs.</a:t>
+              <a:t>Big tech companies (Google, Microsoft, OpenAI) are buying up over 80% of all memory chip wafers for AI servers.</a:t>
+            </a:r>
+            <a:br/>
+            <a:br/>
+            <a:r>
+              <a:t>Because factories are focused on AI chips, regular phone and laptop RAM has become scarce, driving device prices up.</a:t>
             </a:r>
           </a:p>
         </p:txBody>
@@ -4329,14 +4372,69 @@
       </p:sp>
       <p:sp>
         <p:nvSpPr>
-          <p:cNvPr id="3" name="TextBox 2"/>
+          <p:cNvPr id="3" name="Rounded Rectangle 2"/>
+          <p:cNvSpPr/>
+          <p:nvPr/>
+        </p:nvSpPr>
+        <p:spPr>
+          <a:xfrm>
+            <a:off x="731520" y="384048"/>
+            <a:ext cx="2926080" cy="292608"/>
+          </a:xfrm>
+          <a:prstGeom prst="roundRect">
+            <a:avLst/>
+          </a:prstGeom>
+          <a:solidFill>
+            <a:srgbClr val="EFF6FF"/>
+          </a:solidFill>
+          <a:ln w="12700">
+            <a:solidFill>
+              <a:srgbClr val="2563EB"/>
+            </a:solidFill>
+          </a:ln>
+        </p:spPr>
+        <p:style>
+          <a:lnRef idx="1">
+            <a:schemeClr val="accent1"/>
+          </a:lnRef>
+          <a:fillRef idx="3">
+            <a:schemeClr val="accent1"/>
+          </a:fillRef>
+          <a:effectRef idx="2">
+            <a:schemeClr val="accent1"/>
+          </a:effectRef>
+          <a:fontRef idx="minor">
+            <a:schemeClr val="lt1"/>
+          </a:fontRef>
+        </p:style>
+        <p:txBody>
+          <a:bodyPr rtlCol="0" anchor="ctr" lIns="0" tIns="0" rIns="0" bIns="0"/>
+          <a:lstStyle/>
+          <a:p>
+            <a:pPr algn="ctr">
+              <a:defRPr sz="850" b="1">
+                <a:solidFill>
+                  <a:srgbClr val="2563EB"/>
+                </a:solidFill>
+                <a:latin typeface="Segoe UI"/>
+              </a:defRPr>
+            </a:pPr>
+            <a:r>
+              <a:t>02. THE FAILURE MODE</a:t>
+            </a:r>
+          </a:p>
+        </p:txBody>
+      </p:sp>
+      <p:sp>
+        <p:nvSpPr>
+          <p:cNvPr id="4" name="TextBox 3"/>
           <p:cNvSpPr txBox="1"/>
           <p:nvPr/>
         </p:nvSpPr>
         <p:spPr>
           <a:xfrm>
-            <a:off x="731520" y="411480"/>
-            <a:ext cx="10698480" cy="320040"/>
+            <a:off x="731520" y="749808"/>
+            <a:ext cx="10698480" cy="502920"/>
           </a:xfrm>
           <a:prstGeom prst="rect">
             <a:avLst/>
@@ -4350,29 +4448,29 @@
           <a:lstStyle/>
           <a:p>
             <a:pPr>
-              <a:defRPr sz="950" b="1">
-                <a:solidFill>
-                  <a:srgbClr val="2563EB"/>
-                </a:solidFill>
-                <a:latin typeface="Segoe UI"/>
-              </a:defRPr>
-            </a:pPr>
-            <a:r>
-              <a:t>02. THE ENTERPRISE BLINDSPOT</a:t>
-            </a:r>
-          </a:p>
-        </p:txBody>
-      </p:sp>
-      <p:sp>
-        <p:nvSpPr>
-          <p:cNvPr id="4" name="TextBox 3"/>
+              <a:defRPr sz="2100" b="1">
+                <a:solidFill>
+                  <a:srgbClr val="0F172A"/>
+                </a:solidFill>
+                <a:latin typeface="Segoe UI"/>
+              </a:defRPr>
+            </a:pPr>
+            <a:r>
+              <a:t>Why Spreadsheets &amp; Traditional ERPs Fail During Shocks</a:t>
+            </a:r>
+          </a:p>
+        </p:txBody>
+      </p:sp>
+      <p:sp>
+        <p:nvSpPr>
+          <p:cNvPr id="5" name="TextBox 4"/>
           <p:cNvSpPr txBox="1"/>
           <p:nvPr/>
         </p:nvSpPr>
         <p:spPr>
           <a:xfrm>
-            <a:off x="731520" y="731520"/>
-            <a:ext cx="10698480" cy="548640"/>
+            <a:off x="731520" y="1298448"/>
+            <a:ext cx="10698480" cy="320040"/>
           </a:xfrm>
           <a:prstGeom prst="rect">
             <a:avLst/>
@@ -4386,42 +4484,6 @@
           <a:lstStyle/>
           <a:p>
             <a:pPr>
-              <a:defRPr sz="2200" b="1">
-                <a:solidFill>
-                  <a:srgbClr val="0F172A"/>
-                </a:solidFill>
-                <a:latin typeface="Segoe UI"/>
-              </a:defRPr>
-            </a:pPr>
-            <a:r>
-              <a:t>Why Spreadsheets &amp; Traditional ERPs Drive Consumer Price Inflation</a:t>
-            </a:r>
-          </a:p>
-        </p:txBody>
-      </p:sp>
-      <p:sp>
-        <p:nvSpPr>
-          <p:cNvPr id="5" name="TextBox 4"/>
-          <p:cNvSpPr txBox="1"/>
-          <p:nvPr/>
-        </p:nvSpPr>
-        <p:spPr>
-          <a:xfrm>
-            <a:off x="731520" y="1298448"/>
-            <a:ext cx="10698480" cy="365760"/>
-          </a:xfrm>
-          <a:prstGeom prst="rect">
-            <a:avLst/>
-          </a:prstGeom>
-          <a:noFill/>
-        </p:spPr>
-        <p:txBody>
-          <a:bodyPr wrap="square" lIns="0" tIns="0" rIns="0" bIns="0">
-            <a:spAutoFit/>
-          </a:bodyPr>
-          <a:lstStyle/>
-          <a:p>
-            <a:pPr>
               <a:defRPr sz="1100">
                 <a:solidFill>
                   <a:srgbClr val="64748B"/>
@@ -4430,7 +4492,7 @@
               </a:defRPr>
             </a:pPr>
             <a:r>
-              <a:t>Legacy enterprise software is purely transactional, leaving manufacturers blind to compounding physical shocks.</a:t>
+              <a:t>Companies don't have real-time optimization tools, so they pass 100% of the cost to consumers.</a:t>
             </a:r>
           </a:p>
         </p:txBody>
@@ -4511,23 +4573,24 @@
               </a:defRPr>
             </a:pPr>
             <a:r>
-              <a:t>How Legacy Enterprise Tools Fail Under Acute Shocks</a:t>
+              <a:t>How Companies Handle Shocks Today (Old Way)</a:t>
             </a:r>
           </a:p>
           <a:p>
             <a:pPr>
               <a:spcBef>
-                <a:spcPts val="1000"/>
+                <a:spcPts val="1200"/>
               </a:spcBef>
             </a:pPr>
             <a:r>
-              <a:rPr sz="950" b="1">
-                <a:solidFill>
-                  <a:srgbClr val="2563EB"/>
+              <a:rPr sz="1000" b="1">
+                <a:solidFill>
+                  <a:srgbClr val="E11D48"/>
                 </a:solidFill>
                 <a:latin typeface="Segoe UI"/>
               </a:rPr>
-              <a:t>Static Moving Averages: </a:t>
+              <a:t>❌ Slow Manual Calls (Takes 4 Weeks):
+</a:t>
             </a:r>
             <a:r>
               <a:rPr sz="950">
@@ -4536,23 +4599,24 @@
                 </a:solidFill>
                 <a:latin typeface="Segoe UI"/>
               </a:rPr>
-              <a:t>Standard ERP platforms (SAP, Oracle) compute standard costs using historical moving averages. They cannot evaluate non-linear step-function tariff changes or sudden canal surcharges.</a:t>
+              <a:t>When freight spikes, procurement managers take weeks calling and emailing other suppliers. By then, the price hike is already locked in.</a:t>
             </a:r>
           </a:p>
           <a:p>
             <a:pPr>
               <a:spcBef>
-                <a:spcPts val="1000"/>
+                <a:spcPts val="1200"/>
               </a:spcBef>
             </a:pPr>
             <a:r>
-              <a:rPr sz="950" b="1">
-                <a:solidFill>
-                  <a:srgbClr val="2563EB"/>
+              <a:rPr sz="1000" b="1">
+                <a:solidFill>
+                  <a:srgbClr val="E11D48"/>
                 </a:solidFill>
                 <a:latin typeface="Segoe UI"/>
               </a:rPr>
-              <a:t>Single-Node Visibility: </a:t>
+              <a:t>❌ Blind to Raw Parts:
+</a:t>
             </a:r>
             <a:r>
               <a:rPr sz="950">
@@ -4561,23 +4625,24 @@
                 </a:solidFill>
                 <a:latin typeface="Segoe UI"/>
               </a:rPr>
-              <a:t>Procurement systems track Tier-1 packaging and component vendors, entirely missing Tier-2/3 dependencies (e.g. SK Hynix DRAM lithography, European gas-fired glass kilns).</a:t>
+              <a:t>Companies buy finished bottles or chips without knowing where the glass, aluminum, or wafers actually came from, making them blind to bottlenecks.</a:t>
             </a:r>
           </a:p>
           <a:p>
             <a:pPr>
               <a:spcBef>
-                <a:spcPts val="1000"/>
+                <a:spcPts val="1200"/>
               </a:spcBef>
             </a:pPr>
             <a:r>
-              <a:rPr sz="950" b="1">
-                <a:solidFill>
-                  <a:srgbClr val="2563EB"/>
+              <a:rPr sz="1000" b="1">
+                <a:solidFill>
+                  <a:srgbClr val="E11D48"/>
                 </a:solidFill>
                 <a:latin typeface="Segoe UI"/>
               </a:rPr>
-              <a:t>Manual Multi-Week Negotiations: </a:t>
+              <a:t>❌ Static Spreadsheets:
+</a:t>
             </a:r>
             <a:r>
               <a:rPr sz="950">
@@ -4586,32 +4651,7 @@
                 </a:solidFill>
                 <a:latin typeface="Segoe UI"/>
               </a:rPr>
-              <a:t>Procurement teams take 3 to 6 weeks to solicit alternative supplier quotes. By then, unhedged price surges are already locked into production orders.</a:t>
-            </a:r>
-          </a:p>
-          <a:p>
-            <a:pPr>
-              <a:spcBef>
-                <a:spcPts val="1000"/>
-              </a:spcBef>
-            </a:pPr>
-            <a:r>
-              <a:rPr sz="950" b="1">
-                <a:solidFill>
-                  <a:srgbClr val="2563EB"/>
-                </a:solidFill>
-                <a:latin typeface="Segoe UI"/>
-              </a:rPr>
-              <a:t>No Circular Optimization: </a:t>
-            </a:r>
-            <a:r>
-              <a:rPr sz="950">
-                <a:solidFill>
-                  <a:srgbClr val="475569"/>
-                </a:solidFill>
-                <a:latin typeface="Segoe UI"/>
-              </a:rPr>
-              <a:t>Legacy systems cannot balance secondary recycled scrap mandates against maritime lead times, defaulting to expensive single-source suppliers.</a:t>
+              <a:t>Excel only shows historical averages. It cannot calculate complex trade-offs like tariffs vs. local shipping vs. recycling mandates.</a:t>
             </a:r>
           </a:p>
         </p:txBody>
@@ -4686,29 +4726,30 @@
             <a:pPr>
               <a:defRPr sz="1400" b="1">
                 <a:solidFill>
-                  <a:srgbClr val="DB2777"/>
-                </a:solidFill>
-                <a:latin typeface="Segoe UI"/>
-              </a:defRPr>
-            </a:pPr>
-            <a:r>
-              <a:t>The Human Consequence: Inflation at the Checkout</a:t>
+                  <a:srgbClr val="0F172A"/>
+                </a:solidFill>
+                <a:latin typeface="Segoe UI"/>
+              </a:defRPr>
+            </a:pPr>
+            <a:r>
+              <a:t>The Consequence for Everyday People</a:t>
             </a:r>
           </a:p>
           <a:p>
             <a:pPr>
               <a:spcBef>
-                <a:spcPts val="1000"/>
+                <a:spcPts val="1200"/>
               </a:spcBef>
             </a:pPr>
             <a:r>
-              <a:rPr sz="950" b="1">
-                <a:solidFill>
-                  <a:srgbClr val="DB2777"/>
+              <a:rPr sz="1000" b="1">
+                <a:solidFill>
+                  <a:srgbClr val="0D9488"/>
                 </a:solidFill>
                 <a:latin typeface="Segoe UI"/>
               </a:rPr>
-              <a:t>Zero Margin Buffer: </a:t>
+              <a:t>💸 Grocery Checkout Inflation:
+</a:t>
             </a:r>
             <a:r>
               <a:rPr sz="950">
@@ -4717,23 +4758,24 @@
                 </a:solidFill>
                 <a:latin typeface="Segoe UI"/>
               </a:rPr>
-              <a:t>Food and beverage brands operate on net margins between 35%–42%. They physically cannot absorb 40%+ packaging landed cost surges without going into the red.</a:t>
+              <a:t>Food and beverage brands run on tight 35% margins. If their packaging jumps 40%, they can't absorb it. They increase the shelf price at the supermarket.</a:t>
             </a:r>
           </a:p>
           <a:p>
             <a:pPr>
               <a:spcBef>
-                <a:spcPts val="1000"/>
+                <a:spcPts val="1200"/>
               </a:spcBef>
             </a:pPr>
             <a:r>
-              <a:rPr sz="950" b="1">
-                <a:solidFill>
-                  <a:srgbClr val="DB2777"/>
+              <a:rPr sz="1000" b="1">
+                <a:solidFill>
+                  <a:srgbClr val="0D9488"/>
                 </a:solidFill>
                 <a:latin typeface="Segoe UI"/>
               </a:rPr>
-              <a:t>The Immediate Pass-Through: </a:t>
+              <a:t>📦 Shrinkflation at the Store:
+</a:t>
             </a:r>
             <a:r>
               <a:rPr sz="950">
@@ -4742,23 +4784,24 @@
                 </a:solidFill>
                 <a:latin typeface="Segoe UI"/>
               </a:rPr>
-              <a:t>Manufacturers pass 100% of unmitigated packaging and memory surges down through distributors and supermarkets. Consumers face higher prices for instant coffee, oils, and electronics.</a:t>
+              <a:t>When brands fear losing customers from price hikes, they reduce the package size while charging the same price—giving you less product for your money.</a:t>
             </a:r>
           </a:p>
           <a:p>
             <a:pPr>
               <a:spcBef>
-                <a:spcPts val="1000"/>
+                <a:spcPts val="1200"/>
               </a:spcBef>
             </a:pPr>
             <a:r>
-              <a:rPr sz="950" b="1">
-                <a:solidFill>
-                  <a:srgbClr val="DB2777"/>
+              <a:rPr sz="1000" b="1">
+                <a:solidFill>
+                  <a:srgbClr val="0D9488"/>
                 </a:solidFill>
                 <a:latin typeface="Segoe UI"/>
               </a:rPr>
-              <a:t>Shrinkflation Dynamics: </a:t>
+              <a:t>🛡️ What BasketShield Changes:
+</a:t>
             </a:r>
             <a:r>
               <a:rPr sz="950">
@@ -4767,32 +4810,7 @@
                 </a:solidFill>
                 <a:latin typeface="Segoe UI"/>
               </a:rPr>
-              <a:t>When brands hit consumer price resistance ceilings, they reduce product volume while maintaining package pricing—a direct consequence of packaging un-resilience.</a:t>
-            </a:r>
-          </a:p>
-          <a:p>
-            <a:pPr>
-              <a:spcBef>
-                <a:spcPts val="1000"/>
-              </a:spcBef>
-            </a:pPr>
-            <a:r>
-              <a:rPr sz="950" b="1">
-                <a:solidFill>
-                  <a:srgbClr val="DB2777"/>
-                </a:solidFill>
-                <a:latin typeface="Segoe UI"/>
-              </a:rPr>
-              <a:t>The BasketShield Solution: </a:t>
-            </a:r>
-            <a:r>
-              <a:rPr sz="950">
-                <a:solidFill>
-                  <a:srgbClr val="475569"/>
-                </a:solidFill>
-                <a:latin typeface="Segoe UI"/>
-              </a:rPr>
-              <a:t>Replace reactive price increases with sub-15ms deterministic mathematical solver reallocation, nearshoring, and circular recycling arbitrage.</a:t>
+              <a:t>Instead of waiting weeks or raising prices, BasketShield AI solves the math in 15 milliseconds, immediately routing orders to cheaper domestic suppliers!</a:t>
             </a:r>
           </a:p>
         </p:txBody>
@@ -4860,14 +4878,69 @@
       </p:sp>
       <p:sp>
         <p:nvSpPr>
-          <p:cNvPr id="3" name="TextBox 2"/>
+          <p:cNvPr id="3" name="Rounded Rectangle 2"/>
+          <p:cNvSpPr/>
+          <p:nvPr/>
+        </p:nvSpPr>
+        <p:spPr>
+          <a:xfrm>
+            <a:off x="731520" y="384048"/>
+            <a:ext cx="2926080" cy="292608"/>
+          </a:xfrm>
+          <a:prstGeom prst="roundRect">
+            <a:avLst/>
+          </a:prstGeom>
+          <a:solidFill>
+            <a:srgbClr val="EFF6FF"/>
+          </a:solidFill>
+          <a:ln w="12700">
+            <a:solidFill>
+              <a:srgbClr val="2563EB"/>
+            </a:solidFill>
+          </a:ln>
+        </p:spPr>
+        <p:style>
+          <a:lnRef idx="1">
+            <a:schemeClr val="accent1"/>
+          </a:lnRef>
+          <a:fillRef idx="3">
+            <a:schemeClr val="accent1"/>
+          </a:fillRef>
+          <a:effectRef idx="2">
+            <a:schemeClr val="accent1"/>
+          </a:effectRef>
+          <a:fontRef idx="minor">
+            <a:schemeClr val="lt1"/>
+          </a:fontRef>
+        </p:style>
+        <p:txBody>
+          <a:bodyPr rtlCol="0" anchor="ctr" lIns="0" tIns="0" rIns="0" bIns="0"/>
+          <a:lstStyle/>
+          <a:p>
+            <a:pPr algn="ctr">
+              <a:defRPr sz="850" b="1">
+                <a:solidFill>
+                  <a:srgbClr val="2563EB"/>
+                </a:solidFill>
+                <a:latin typeface="Segoe UI"/>
+              </a:defRPr>
+            </a:pPr>
+            <a:r>
+              <a:t>03. THE SOLUTION</a:t>
+            </a:r>
+          </a:p>
+        </p:txBody>
+      </p:sp>
+      <p:sp>
+        <p:nvSpPr>
+          <p:cNvPr id="4" name="TextBox 3"/>
           <p:cNvSpPr txBox="1"/>
           <p:nvPr/>
         </p:nvSpPr>
         <p:spPr>
           <a:xfrm>
-            <a:off x="731520" y="411480"/>
-            <a:ext cx="10698480" cy="320040"/>
+            <a:off x="731520" y="749808"/>
+            <a:ext cx="10698480" cy="502920"/>
           </a:xfrm>
           <a:prstGeom prst="rect">
             <a:avLst/>
@@ -4881,29 +4954,29 @@
           <a:lstStyle/>
           <a:p>
             <a:pPr>
-              <a:defRPr sz="950" b="1">
-                <a:solidFill>
-                  <a:srgbClr val="2563EB"/>
-                </a:solidFill>
-                <a:latin typeface="Segoe UI"/>
-              </a:defRPr>
-            </a:pPr>
-            <a:r>
-              <a:t>03. SOLUTION ARCHITECTURE</a:t>
-            </a:r>
-          </a:p>
-        </p:txBody>
-      </p:sp>
-      <p:sp>
-        <p:nvSpPr>
-          <p:cNvPr id="4" name="TextBox 3"/>
+              <a:defRPr sz="2100" b="1">
+                <a:solidFill>
+                  <a:srgbClr val="0F172A"/>
+                </a:solidFill>
+                <a:latin typeface="Segoe UI"/>
+              </a:defRPr>
+            </a:pPr>
+            <a:r>
+              <a:t>How BasketShield AI Solves It in 3 Simple Steps</a:t>
+            </a:r>
+          </a:p>
+        </p:txBody>
+      </p:sp>
+      <p:sp>
+        <p:nvSpPr>
+          <p:cNvPr id="5" name="TextBox 4"/>
           <p:cNvSpPr txBox="1"/>
           <p:nvPr/>
         </p:nvSpPr>
         <p:spPr>
           <a:xfrm>
-            <a:off x="731520" y="731520"/>
-            <a:ext cx="10698480" cy="548640"/>
+            <a:off x="731520" y="1298448"/>
+            <a:ext cx="10698480" cy="320040"/>
           </a:xfrm>
           <a:prstGeom prst="rect">
             <a:avLst/>
@@ -4917,42 +4990,6 @@
           <a:lstStyle/>
           <a:p>
             <a:pPr>
-              <a:defRPr sz="2200" b="1">
-                <a:solidFill>
-                  <a:srgbClr val="0F172A"/>
-                </a:solidFill>
-                <a:latin typeface="Segoe UI"/>
-              </a:defRPr>
-            </a:pPr>
-            <a:r>
-              <a:t>The BasketShield AI Decision Intelligence Pipeline</a:t>
-            </a:r>
-          </a:p>
-        </p:txBody>
-      </p:sp>
-      <p:sp>
-        <p:nvSpPr>
-          <p:cNvPr id="5" name="TextBox 4"/>
-          <p:cNvSpPr txBox="1"/>
-          <p:nvPr/>
-        </p:nvSpPr>
-        <p:spPr>
-          <a:xfrm>
-            <a:off x="731520" y="1298448"/>
-            <a:ext cx="10698480" cy="365760"/>
-          </a:xfrm>
-          <a:prstGeom prst="rect">
-            <a:avLst/>
-          </a:prstGeom>
-          <a:noFill/>
-        </p:spPr>
-        <p:txBody>
-          <a:bodyPr wrap="square" lIns="0" tIns="0" rIns="0" bIns="0">
-            <a:spAutoFit/>
-          </a:bodyPr>
-          <a:lstStyle/>
-          <a:p>
-            <a:pPr>
               <a:defRPr sz="1100">
                 <a:solidFill>
                   <a:srgbClr val="64748B"/>
@@ -4961,7 +4998,7 @@
               </a:defRPr>
             </a:pPr>
             <a:r>
-              <a:t>An integrated pipeline connecting granular physical Bill-of-Materials with deterministic Operations Research.</a:t>
+              <a:t>An automated workflow from raw product parts to sub-15ms mathematical optimization.</a:t>
             </a:r>
           </a:p>
         </p:txBody>
@@ -5020,13 +5057,13 @@
         <p:spPr>
           <a:xfrm>
             <a:off x="914400" y="1965960"/>
-            <a:ext cx="3044952" cy="411480"/>
+            <a:ext cx="3044952" cy="384048"/>
           </a:xfrm>
           <a:prstGeom prst="roundRect">
             <a:avLst/>
           </a:prstGeom>
           <a:solidFill>
-            <a:srgbClr val="EFF6FF"/>
+            <a:srgbClr val="F8FAFC"/>
           </a:solidFill>
           <a:ln w="12700">
             <a:solidFill>
@@ -5061,7 +5098,7 @@
               </a:defRPr>
             </a:pPr>
             <a:r>
-              <a:t>6,000 VERIFIED SKUS</a:t>
+              <a:t>STEP 1: BREAK DOWN THE PRODUCT</a:t>
             </a:r>
           </a:p>
         </p:txBody>
@@ -5074,8 +5111,8 @@
         </p:nvSpPr>
         <p:spPr>
           <a:xfrm>
-            <a:off x="914400" y="2514600"/>
-            <a:ext cx="3044952" cy="3017520"/>
+            <a:off x="914400" y="2468880"/>
+            <a:ext cx="3044952" cy="3108960"/>
           </a:xfrm>
           <a:prstGeom prst="rect">
             <a:avLst/>
@@ -5089,7 +5126,7 @@
           <a:lstStyle/>
           <a:p>
             <a:pPr>
-              <a:defRPr sz="1300" b="1">
+              <a:defRPr sz="1250" b="1">
                 <a:solidFill>
                   <a:srgbClr val="0F172A"/>
                 </a:solidFill>
@@ -5097,7 +5134,7 @@
               </a:defRPr>
             </a:pPr>
             <a:r>
-              <a:t>1. Multi-Sector Catalog</a:t>
+              <a:t>🔬 Physical Parts Decomposition</a:t>
             </a:r>
           </a:p>
           <a:p>
@@ -5113,25 +5150,21 @@
               </a:defRPr>
             </a:pPr>
             <a:r>
-              <a:t>Grounded real-world catalog across three critical sectors:</a:t>
+              <a:t>BasketShield uses AI and physical catalogs to break down any product into its exact components:</a:t>
             </a:r>
             <a:br/>
             <a:br/>
             <a:r>
-              <a:t>• FMCG Consumer Groceries: 2,000 SKUs (coffee jars, oils, aluminum cans)</a:t>
+              <a:t>• For a coffee jar: 214g glass jar, 14.5g plastic lid, 0.8g foil seal, 100g coffee beans.</a:t>
             </a:r>
             <a:br/>
             <a:r>
-              <a:t>• Consumer Electronics: 2,000 SKUs (smartphones, enterprise GPUs, laptops with exact LPDDR5X/HBM3e specs)</a:t>
-            </a:r>
-            <a:br/>
-            <a:r>
-              <a:t>• Automotive &amp; Tesla EVs: 2,000 SKUs (Model 3 chassis, Cybertruck 4680 packs)</a:t>
+              <a:t>• For a phone: Titanium body, display glass, and 8GB LPDDR5X RAM chips.</a:t>
             </a:r>
             <a:br/>
             <a:br/>
             <a:r>
-              <a:t>Stores exact physical masses, tare specs, and lithography origins.</a:t>
+              <a:t>Now we know exactly what materials are vulnerable.</a:t>
             </a:r>
           </a:p>
         </p:txBody>
@@ -5190,17 +5223,17 @@
         <p:spPr>
           <a:xfrm>
             <a:off x="4572000" y="1965960"/>
-            <a:ext cx="3044952" cy="411480"/>
+            <a:ext cx="3044952" cy="384048"/>
           </a:xfrm>
           <a:prstGeom prst="roundRect">
             <a:avLst/>
           </a:prstGeom>
           <a:solidFill>
-            <a:srgbClr val="EFF6FF"/>
+            <a:srgbClr val="F8FAFC"/>
           </a:solidFill>
           <a:ln w="12700">
             <a:solidFill>
-              <a:srgbClr val="2563EB"/>
+              <a:srgbClr val="E11D48"/>
             </a:solidFill>
           </a:ln>
         </p:spPr>
@@ -5225,13 +5258,13 @@
             <a:pPr algn="ctr">
               <a:defRPr sz="950" b="1">
                 <a:solidFill>
-                  <a:srgbClr val="2563EB"/>
-                </a:solidFill>
-                <a:latin typeface="Segoe UI"/>
-              </a:defRPr>
-            </a:pPr>
-            <a:r>
-              <a:t>GEMINI AI &amp; METALLURGY</a:t>
+                  <a:srgbClr val="E11D48"/>
+                </a:solidFill>
+                <a:latin typeface="Segoe UI"/>
+              </a:defRPr>
+            </a:pPr>
+            <a:r>
+              <a:t>STEP 2: TRACK GLOBAL SHOCKS</a:t>
             </a:r>
           </a:p>
         </p:txBody>
@@ -5244,8 +5277,8 @@
         </p:nvSpPr>
         <p:spPr>
           <a:xfrm>
-            <a:off x="4572000" y="2514600"/>
-            <a:ext cx="3044952" cy="3017520"/>
+            <a:off x="4572000" y="2468880"/>
+            <a:ext cx="3044952" cy="3108960"/>
           </a:xfrm>
           <a:prstGeom prst="rect">
             <a:avLst/>
@@ -5259,7 +5292,7 @@
           <a:lstStyle/>
           <a:p>
             <a:pPr>
-              <a:defRPr sz="1300" b="1">
+              <a:defRPr sz="1250" b="1">
                 <a:solidFill>
                   <a:srgbClr val="0F172A"/>
                 </a:solidFill>
@@ -5267,7 +5300,7 @@
               </a:defRPr>
             </a:pPr>
             <a:r>
-              <a:t>2. Physical BOM Engine</a:t>
+              <a:t>🌍 Live Crisis &amp; Tariff Engine</a:t>
             </a:r>
           </a:p>
           <a:p>
@@ -5283,24 +5316,25 @@
               </a:defRPr>
             </a:pPr>
             <a:r>
-              <a:t>Deconstructs any commercial SKU into physical components:</a:t>
+              <a:t>The platform tracks real-world disruption scenarios:</a:t>
             </a:r>
             <a:br/>
             <a:br/>
             <a:r>
-              <a:t>• Primary Container Material (Soda-Lime Flint Glass, AA 3104 Canstock, Grade 5 Titanium)</a:t>
+              <a:t>• Red Sea and Suez shipping congestion.</a:t>
             </a:r>
             <a:br/>
             <a:r>
-              <a:t>• Component Masses in grams (Jar 214g, Closure 14.5g, Seal 0.8g)</a:t>
+              <a:t>• European glass and aluminum gas tariffs.</a:t>
             </a:r>
             <a:br/>
             <a:r>
-              <a:t>• Foundry &amp; Fab Dependencies (TSMC 3nm, SK Hynix Icheon, Samsung Pyeongtaek)</a:t>
+              <a:t>• AI memory wafer shortages at chip foundries.</a:t>
             </a:r>
             <a:br/>
-            <a:r>
-              <a:t>• Macro Shock Transmissibility: Dynamic tariff, demurrage, and spot freight index mapping.</a:t>
+            <a:br/>
+            <a:r>
+              <a:t>It calculates how each shock affects individual raw materials in real time.</a:t>
             </a:r>
           </a:p>
         </p:txBody>
@@ -5359,17 +5393,17 @@
         <p:spPr>
           <a:xfrm>
             <a:off x="8229600" y="1965960"/>
-            <a:ext cx="3044952" cy="411480"/>
+            <a:ext cx="3044952" cy="384048"/>
           </a:xfrm>
           <a:prstGeom prst="roundRect">
             <a:avLst/>
           </a:prstGeom>
           <a:solidFill>
-            <a:srgbClr val="ECFDF5"/>
+            <a:srgbClr val="F8FAFC"/>
           </a:solidFill>
           <a:ln w="12700">
             <a:solidFill>
-              <a:srgbClr val="059669"/>
+              <a:srgbClr val="0D9488"/>
             </a:solidFill>
           </a:ln>
         </p:spPr>
@@ -5394,13 +5428,13 @@
             <a:pPr algn="ctr">
               <a:defRPr sz="950" b="1">
                 <a:solidFill>
-                  <a:srgbClr val="059669"/>
-                </a:solidFill>
-                <a:latin typeface="Segoe UI"/>
-              </a:defRPr>
-            </a:pPr>
-            <a:r>
-              <a:t>SUB-15MS OPTIMIZATION</a:t>
+                  <a:srgbClr val="0D9488"/>
+                </a:solidFill>
+                <a:latin typeface="Segoe UI"/>
+              </a:defRPr>
+            </a:pPr>
+            <a:r>
+              <a:t>STEP 3: SOLVE THE MATH IN 15MS</a:t>
             </a:r>
           </a:p>
         </p:txBody>
@@ -5413,8 +5447,8 @@
         </p:nvSpPr>
         <p:spPr>
           <a:xfrm>
-            <a:off x="8229600" y="2514600"/>
-            <a:ext cx="3044952" cy="3017520"/>
+            <a:off x="8229600" y="2468880"/>
+            <a:ext cx="3044952" cy="3108960"/>
           </a:xfrm>
           <a:prstGeom prst="rect">
             <a:avLst/>
@@ -5428,7 +5462,7 @@
           <a:lstStyle/>
           <a:p>
             <a:pPr>
-              <a:defRPr sz="1300" b="1">
+              <a:defRPr sz="1250" b="1">
                 <a:solidFill>
                   <a:srgbClr val="0F172A"/>
                 </a:solidFill>
@@ -5436,7 +5470,7 @@
               </a:defRPr>
             </a:pPr>
             <a:r>
-              <a:t>3. Google OR-Tools MILP</a:t>
+              <a:t>⚡ Google OR-Tools Optimizer</a:t>
             </a:r>
           </a:p>
           <a:p>
@@ -5452,24 +5486,20 @@
               </a:defRPr>
             </a:pPr>
             <a:r>
-              <a:t>Mixed-Integer Linear Programming engine solving multi-vendor allocation:</a:t>
+              <a:t>Instead of human guesswork, Google OR-Tools runs a Mixed-Integer Linear Program (MILP) to find the best plan:</a:t>
             </a:r>
             <a:br/>
             <a:br/>
             <a:r>
-              <a:t>• Strict Demand Conservation: Guarantees zero unfulfilled orders</a:t>
+              <a:t>• Selects the cheapest local and nearshore suppliers.</a:t>
             </a:r>
             <a:br/>
             <a:r>
-              <a:t>• Big-M Semi-Continuous Gating: Enforces vendor activation thresholds and MOQs</a:t>
+              <a:t>• Bypasses import tariffs and expensive shipping routes.</a:t>
             </a:r>
             <a:br/>
             <a:r>
-              <a:t>• Recycled Fleet Mandate: Guarantees circular scrap compliance</a:t>
-            </a:r>
-            <a:br/>
-            <a:r>
-              <a:t>• Nearshoring Breakeven: Identifies the exact mathematical distance where domestic sourcing beats tariffs.</a:t>
+              <a:t>• Guarantees 70%+ recycled material usage.</a:t>
             </a:r>
           </a:p>
         </p:txBody>
@@ -5542,15 +5572,15 @@
           <a:lstStyle/>
           <a:p>
             <a:pPr algn="ctr">
-              <a:defRPr sz="950" b="1">
-                <a:solidFill>
-                  <a:srgbClr val="0F172A"/>
-                </a:solidFill>
-                <a:latin typeface="Segoe UI"/>
-              </a:defRPr>
-            </a:pPr>
-            <a:r>
-              <a:t>DATA FLOW: Macro Shock Scenarios → Physical BOM Parameterization → SCIP MILP Solver → Optimal Supplier Allocation &amp; Defended Shelf Price</a:t>
+              <a:defRPr sz="1000" b="1">
+                <a:solidFill>
+                  <a:srgbClr val="2563EB"/>
+                </a:solidFill>
+                <a:latin typeface="Segoe UI"/>
+              </a:defRPr>
+            </a:pPr>
+            <a:r>
+              <a:t>RESULT: Enterprise managers get the mathematically cheapest sourcing plan in under 15 milliseconds!</a:t>
             </a:r>
           </a:p>
         </p:txBody>
@@ -5618,14 +5648,69 @@
       </p:sp>
       <p:sp>
         <p:nvSpPr>
-          <p:cNvPr id="3" name="TextBox 2"/>
+          <p:cNvPr id="3" name="Rounded Rectangle 2"/>
+          <p:cNvSpPr/>
+          <p:nvPr/>
+        </p:nvSpPr>
+        <p:spPr>
+          <a:xfrm>
+            <a:off x="731520" y="384048"/>
+            <a:ext cx="2926080" cy="292608"/>
+          </a:xfrm>
+          <a:prstGeom prst="roundRect">
+            <a:avLst/>
+          </a:prstGeom>
+          <a:solidFill>
+            <a:srgbClr val="EFF6FF"/>
+          </a:solidFill>
+          <a:ln w="12700">
+            <a:solidFill>
+              <a:srgbClr val="2563EB"/>
+            </a:solidFill>
+          </a:ln>
+        </p:spPr>
+        <p:style>
+          <a:lnRef idx="1">
+            <a:schemeClr val="accent1"/>
+          </a:lnRef>
+          <a:fillRef idx="3">
+            <a:schemeClr val="accent1"/>
+          </a:fillRef>
+          <a:effectRef idx="2">
+            <a:schemeClr val="accent1"/>
+          </a:effectRef>
+          <a:fontRef idx="minor">
+            <a:schemeClr val="lt1"/>
+          </a:fontRef>
+        </p:style>
+        <p:txBody>
+          <a:bodyPr rtlCol="0" anchor="ctr" lIns="0" tIns="0" rIns="0" bIns="0"/>
+          <a:lstStyle/>
+          <a:p>
+            <a:pPr algn="ctr">
+              <a:defRPr sz="850" b="1">
+                <a:solidFill>
+                  <a:srgbClr val="2563EB"/>
+                </a:solidFill>
+                <a:latin typeface="Segoe UI"/>
+              </a:defRPr>
+            </a:pPr>
+            <a:r>
+              <a:t>04. PRODUCT DEMO</a:t>
+            </a:r>
+          </a:p>
+        </p:txBody>
+      </p:sp>
+      <p:sp>
+        <p:nvSpPr>
+          <p:cNvPr id="4" name="TextBox 3"/>
           <p:cNvSpPr txBox="1"/>
           <p:nvPr/>
         </p:nvSpPr>
         <p:spPr>
           <a:xfrm>
-            <a:off x="731520" y="411480"/>
-            <a:ext cx="10698480" cy="320040"/>
+            <a:off x="731520" y="749808"/>
+            <a:ext cx="10698480" cy="502920"/>
           </a:xfrm>
           <a:prstGeom prst="rect">
             <a:avLst/>
@@ -5639,29 +5724,29 @@
           <a:lstStyle/>
           <a:p>
             <a:pPr>
-              <a:defRPr sz="950" b="1">
-                <a:solidFill>
-                  <a:srgbClr val="2563EB"/>
-                </a:solidFill>
-                <a:latin typeface="Segoe UI"/>
-              </a:defRPr>
-            </a:pPr>
-            <a:r>
-              <a:t>04. PLATFORM DEMONSTRATION</a:t>
-            </a:r>
-          </a:p>
-        </p:txBody>
-      </p:sp>
-      <p:sp>
-        <p:nvSpPr>
-          <p:cNvPr id="4" name="TextBox 3"/>
+              <a:defRPr sz="2100" b="1">
+                <a:solidFill>
+                  <a:srgbClr val="0F172A"/>
+                </a:solidFill>
+                <a:latin typeface="Segoe UI"/>
+              </a:defRPr>
+            </a:pPr>
+            <a:r>
+              <a:t>The Resilience Cockpit: Simulating Shocks in Real Time</a:t>
+            </a:r>
+          </a:p>
+        </p:txBody>
+      </p:sp>
+      <p:sp>
+        <p:nvSpPr>
+          <p:cNvPr id="5" name="TextBox 4"/>
           <p:cNvSpPr txBox="1"/>
           <p:nvPr/>
         </p:nvSpPr>
         <p:spPr>
           <a:xfrm>
-            <a:off x="731520" y="731520"/>
-            <a:ext cx="10698480" cy="548640"/>
+            <a:off x="731520" y="1298448"/>
+            <a:ext cx="10698480" cy="320040"/>
           </a:xfrm>
           <a:prstGeom prst="rect">
             <a:avLst/>
@@ -5675,42 +5760,6 @@
           <a:lstStyle/>
           <a:p>
             <a:pPr>
-              <a:defRPr sz="2200" b="1">
-                <a:solidFill>
-                  <a:srgbClr val="0F172A"/>
-                </a:solidFill>
-                <a:latin typeface="Segoe UI"/>
-              </a:defRPr>
-            </a:pPr>
-            <a:r>
-              <a:t>Resilience Cockpit: Interactive Chokepoint &amp; Shock Studio</a:t>
-            </a:r>
-          </a:p>
-        </p:txBody>
-      </p:sp>
-      <p:sp>
-        <p:nvSpPr>
-          <p:cNvPr id="5" name="TextBox 4"/>
-          <p:cNvSpPr txBox="1"/>
-          <p:nvPr/>
-        </p:nvSpPr>
-        <p:spPr>
-          <a:xfrm>
-            <a:off x="731520" y="1298448"/>
-            <a:ext cx="10698480" cy="365760"/>
-          </a:xfrm>
-          <a:prstGeom prst="rect">
-            <a:avLst/>
-          </a:prstGeom>
-          <a:noFill/>
-        </p:spPr>
-        <p:txBody>
-          <a:bodyPr wrap="square" lIns="0" tIns="0" rIns="0" bIns="0">
-            <a:spAutoFit/>
-          </a:bodyPr>
-          <a:lstStyle/>
-          <a:p>
-            <a:pPr>
               <a:defRPr sz="1100">
                 <a:solidFill>
                   <a:srgbClr val="64748B"/>
@@ -5719,7 +5768,7 @@
               </a:defRPr>
             </a:pPr>
             <a:r>
-              <a:t>A dark monochrome decision cockpit built with Streamlit and styled with strict shadcn/ui design standards.</a:t>
+              <a:t>A clean, responsive dashboard where users can test 6,000 products against real-world trade crises.</a:t>
             </a:r>
           </a:p>
         </p:txBody>
@@ -5733,7 +5782,7 @@
         <p:spPr>
           <a:xfrm>
             <a:off x="731520" y="1783080"/>
-            <a:ext cx="4297680" cy="4480560"/>
+            <a:ext cx="3931920" cy="4480560"/>
           </a:xfrm>
           <a:prstGeom prst="roundRect">
             <a:avLst/>
@@ -5778,7 +5827,7 @@
         <p:spPr>
           <a:xfrm>
             <a:off x="960120" y="1965960"/>
-            <a:ext cx="3840480" cy="4114800"/>
+            <a:ext cx="3474720" cy="4114800"/>
           </a:xfrm>
           <a:prstGeom prst="rect">
             <a:avLst/>
@@ -5800,23 +5849,24 @@
               </a:defRPr>
             </a:pPr>
             <a:r>
-              <a:t>Operational Cockpit Features</a:t>
+              <a:t>What You Can Do on This Screen:</a:t>
             </a:r>
           </a:p>
           <a:p>
             <a:pPr>
               <a:spcBef>
-                <a:spcPts val="800"/>
+                <a:spcPts val="1400"/>
               </a:spcBef>
             </a:pPr>
             <a:r>
-              <a:rPr sz="919" b="1">
+              <a:rPr sz="1000" b="1">
                 <a:solidFill>
                   <a:srgbClr val="2563EB"/>
                 </a:solidFill>
                 <a:latin typeface="Segoe UI"/>
               </a:rPr>
-              <a:t>Multi-Sector Workspace Switching: </a:t>
+              <a:t>1. Pick Any Product (6,000 SKUs):
+</a:t>
             </a:r>
             <a:r>
               <a:rPr sz="919">
@@ -5825,23 +5875,24 @@
                 </a:solidFill>
                 <a:latin typeface="Segoe UI"/>
               </a:rPr>
-              <a:t>Easily toggle between FMCG Groceries, Consumer Electronics &amp; Computing, and Tesla Electric Vehicles with real-time SKU search across 6,000 catalog items.</a:t>
+              <a:t>Select from 3 sectors: Grocery (coffee, oils), Electronics (phones, GPUs), or Automotive (Tesla Model 3, Cybertruck).</a:t>
             </a:r>
           </a:p>
           <a:p>
             <a:pPr>
               <a:spcBef>
-                <a:spcPts val="800"/>
+                <a:spcPts val="1400"/>
               </a:spcBef>
             </a:pPr>
             <a:r>
-              <a:rPr sz="919" b="1">
+              <a:rPr sz="1000" b="1">
                 <a:solidFill>
                   <a:srgbClr val="2563EB"/>
                 </a:solidFill>
                 <a:latin typeface="Segoe UI"/>
               </a:rPr>
-              <a:t>Acute Shock Studio: </a:t>
+              <a:t>2. Toggle Live Crisis Scenarios:
+</a:t>
             </a:r>
             <a:r>
               <a:rPr sz="919">
@@ -5850,23 +5901,24 @@
                 </a:solidFill>
                 <a:latin typeface="Segoe UI"/>
               </a:rPr>
-              <a:t>Simulate verified geopolitical crises in real time: 2026 Middle East maritime closures (Bab el-Mandeb / Strait of Hormuz), Taiwan Strait container congestion, and smelter gas tariffs.</a:t>
+              <a:t>One-click simulation for the 2026 Red Sea detour, Taiwan Strait congestion, or smelting gas spikes.</a:t>
             </a:r>
           </a:p>
           <a:p>
             <a:pPr>
               <a:spcBef>
-                <a:spcPts val="800"/>
+                <a:spcPts val="1400"/>
               </a:spcBef>
             </a:pPr>
             <a:r>
-              <a:rPr sz="919" b="1">
+              <a:rPr sz="1000" b="1">
                 <a:solidFill>
                   <a:srgbClr val="2563EB"/>
                 </a:solidFill>
                 <a:latin typeface="Segoe UI"/>
               </a:rPr>
-              <a:t>Dynamic Archetype Tagging: </a:t>
+              <a:t>3. Instant Material Identification:
+</a:t>
             </a:r>
             <a:r>
               <a:rPr sz="919">
@@ -5875,32 +5927,7 @@
                 </a:solidFill>
                 <a:latin typeface="Segoe UI"/>
               </a:rPr>
-              <a:t>Classifies products by container form factor (e.g. Glass Jar, Aluminum Can, Smartphone Unibody, 4680 Pack) and binds them directly to global commodity spot indices.</a:t>
-            </a:r>
-          </a:p>
-          <a:p>
-            <a:pPr>
-              <a:spcBef>
-                <a:spcPts val="800"/>
-              </a:spcBef>
-            </a:pPr>
-            <a:r>
-              <a:rPr sz="919" b="1">
-                <a:solidFill>
-                  <a:srgbClr val="2563EB"/>
-                </a:solidFill>
-                <a:latin typeface="Segoe UI"/>
-              </a:rPr>
-              <a:t>Real-Time Vulnerability Flags: </a:t>
-            </a:r>
-            <a:r>
-              <a:rPr sz="919">
-                <a:solidFill>
-                  <a:srgbClr val="475569"/>
-                </a:solidFill>
-                <a:latin typeface="Segoe UI"/>
-              </a:rPr>
-              <a:t>Immediately surfaces primary chokepoints, such as '+14-day Cape detour' and '🧠 HBM3e / DRAM Wafer Crunch (+58%)'.</a:t>
+              <a:t>The app automatically detects packaging types (Glass Jar, Aluminum Can, Battery Pack) and links them to raw market prices.</a:t>
             </a:r>
           </a:p>
         </p:txBody>
@@ -5913,8 +5940,8 @@
         </p:nvSpPr>
         <p:spPr>
           <a:xfrm>
-            <a:off x="5212080" y="1783080"/>
-            <a:ext cx="6245352" cy="4480560"/>
+            <a:off x="4837176" y="1956816"/>
+            <a:ext cx="6647688" cy="3065856"/>
           </a:xfrm>
           <a:prstGeom prst="roundRect">
             <a:avLst/>
@@ -5922,9 +5949,9 @@
           <a:solidFill>
             <a:srgbClr val="FFFFFF"/>
           </a:solidFill>
-          <a:ln w="12700">
+          <a:ln w="19050">
             <a:solidFill>
-              <a:srgbClr val="E2E8F0"/>
+              <a:srgbClr val="CBD5E1"/>
             </a:solidFill>
           </a:ln>
         </p:spPr>
@@ -5966,14 +5993,108 @@
         </p:blipFill>
         <p:spPr>
           <a:xfrm>
-            <a:off x="5303520" y="1874519"/>
-            <a:ext cx="6062472" cy="2735217"/>
+            <a:off x="4892040" y="2011680"/>
+            <a:ext cx="6537960" cy="2956128"/>
           </a:xfrm>
           <a:prstGeom prst="rect">
             <a:avLst/>
           </a:prstGeom>
         </p:spPr>
       </p:pic>
+      <p:sp>
+        <p:nvSpPr>
+          <p:cNvPr id="10" name="Rounded Rectangle 9"/>
+          <p:cNvSpPr/>
+          <p:nvPr/>
+        </p:nvSpPr>
+        <p:spPr>
+          <a:xfrm>
+            <a:off x="4892040" y="5303520"/>
+            <a:ext cx="6647688" cy="960120"/>
+          </a:xfrm>
+          <a:prstGeom prst="roundRect">
+            <a:avLst/>
+          </a:prstGeom>
+          <a:solidFill>
+            <a:srgbClr val="F8FAFC"/>
+          </a:solidFill>
+          <a:ln w="12700">
+            <a:solidFill>
+              <a:srgbClr val="E2E8F0"/>
+            </a:solidFill>
+          </a:ln>
+        </p:spPr>
+        <p:style>
+          <a:lnRef idx="1">
+            <a:schemeClr val="accent1"/>
+          </a:lnRef>
+          <a:fillRef idx="3">
+            <a:schemeClr val="accent1"/>
+          </a:fillRef>
+          <a:effectRef idx="2">
+            <a:schemeClr val="accent1"/>
+          </a:effectRef>
+          <a:fontRef idx="minor">
+            <a:schemeClr val="lt1"/>
+          </a:fontRef>
+        </p:style>
+        <p:txBody>
+          <a:bodyPr rtlCol="0" anchor="ctr"/>
+          <a:lstStyle/>
+          <a:p>
+            <a:pPr algn="ctr"/>
+          </a:p>
+        </p:txBody>
+      </p:sp>
+      <p:sp>
+        <p:nvSpPr>
+          <p:cNvPr id="11" name="TextBox 10"/>
+          <p:cNvSpPr txBox="1"/>
+          <p:nvPr/>
+        </p:nvSpPr>
+        <p:spPr>
+          <a:xfrm>
+            <a:off x="5029200" y="5413248"/>
+            <a:ext cx="6400800" cy="777240"/>
+          </a:xfrm>
+          <a:prstGeom prst="rect">
+            <a:avLst/>
+          </a:prstGeom>
+          <a:noFill/>
+        </p:spPr>
+        <p:txBody>
+          <a:bodyPr wrap="square" lIns="0" tIns="0" rIns="0" bIns="0">
+            <a:spAutoFit/>
+          </a:bodyPr>
+          <a:lstStyle/>
+          <a:p>
+            <a:pPr>
+              <a:defRPr sz="1000" b="1">
+                <a:solidFill>
+                  <a:srgbClr val="0F172A"/>
+                </a:solidFill>
+                <a:latin typeface="Segoe UI"/>
+              </a:defRPr>
+            </a:pPr>
+            <a:r>
+              <a:t>⚡ Real-Time Feedback:</a:t>
+            </a:r>
+          </a:p>
+          <a:p>
+            <a:pPr>
+              <a:defRPr sz="919">
+                <a:solidFill>
+                  <a:srgbClr val="475569"/>
+                </a:solidFill>
+                <a:latin typeface="Segoe UI"/>
+              </a:defRPr>
+            </a:pPr>
+            <a:r>
+              <a:t>When you select a product like Davidoff Espresso 57, the cockpit immediately flags the '+14-day Cape detour' and calculates the exact price impact.</a:t>
+            </a:r>
+          </a:p>
+        </p:txBody>
+      </p:sp>
     </p:spTree>
   </p:cSld>
   <p:clrMapOvr>
@@ -6037,14 +6158,69 @@
       </p:sp>
       <p:sp>
         <p:nvSpPr>
-          <p:cNvPr id="3" name="TextBox 2"/>
+          <p:cNvPr id="3" name="Rounded Rectangle 2"/>
+          <p:cNvSpPr/>
+          <p:nvPr/>
+        </p:nvSpPr>
+        <p:spPr>
+          <a:xfrm>
+            <a:off x="731520" y="384048"/>
+            <a:ext cx="2926080" cy="292608"/>
+          </a:xfrm>
+          <a:prstGeom prst="roundRect">
+            <a:avLst/>
+          </a:prstGeom>
+          <a:solidFill>
+            <a:srgbClr val="EFF6FF"/>
+          </a:solidFill>
+          <a:ln w="12700">
+            <a:solidFill>
+              <a:srgbClr val="2563EB"/>
+            </a:solidFill>
+          </a:ln>
+        </p:spPr>
+        <p:style>
+          <a:lnRef idx="1">
+            <a:schemeClr val="accent1"/>
+          </a:lnRef>
+          <a:fillRef idx="3">
+            <a:schemeClr val="accent1"/>
+          </a:fillRef>
+          <a:effectRef idx="2">
+            <a:schemeClr val="accent1"/>
+          </a:effectRef>
+          <a:fontRef idx="minor">
+            <a:schemeClr val="lt1"/>
+          </a:fontRef>
+        </p:style>
+        <p:txBody>
+          <a:bodyPr rtlCol="0" anchor="ctr" lIns="0" tIns="0" rIns="0" bIns="0"/>
+          <a:lstStyle/>
+          <a:p>
+            <a:pPr algn="ctr">
+              <a:defRPr sz="850" b="1">
+                <a:solidFill>
+                  <a:srgbClr val="2563EB"/>
+                </a:solidFill>
+                <a:latin typeface="Segoe UI"/>
+              </a:defRPr>
+            </a:pPr>
+            <a:r>
+              <a:t>05. THE PROOF</a:t>
+            </a:r>
+          </a:p>
+        </p:txBody>
+      </p:sp>
+      <p:sp>
+        <p:nvSpPr>
+          <p:cNvPr id="4" name="TextBox 3"/>
           <p:cNvSpPr txBox="1"/>
           <p:nvPr/>
         </p:nvSpPr>
         <p:spPr>
           <a:xfrm>
-            <a:off x="731520" y="411480"/>
-            <a:ext cx="10698480" cy="320040"/>
+            <a:off x="731520" y="749808"/>
+            <a:ext cx="10698480" cy="502920"/>
           </a:xfrm>
           <a:prstGeom prst="rect">
             <a:avLst/>
@@ -6058,29 +6234,29 @@
           <a:lstStyle/>
           <a:p>
             <a:pPr>
-              <a:defRPr sz="950" b="1">
-                <a:solidFill>
-                  <a:srgbClr val="2563EB"/>
-                </a:solidFill>
-                <a:latin typeface="Segoe UI"/>
-              </a:defRPr>
-            </a:pPr>
-            <a:r>
-              <a:t>05. EMPIRICAL PROOF &amp; UNIT ECONOMICS</a:t>
-            </a:r>
-          </a:p>
-        </p:txBody>
-      </p:sp>
-      <p:sp>
-        <p:nvSpPr>
-          <p:cNvPr id="4" name="TextBox 3"/>
+              <a:defRPr sz="2100" b="1">
+                <a:solidFill>
+                  <a:srgbClr val="0F172A"/>
+                </a:solidFill>
+                <a:latin typeface="Segoe UI"/>
+              </a:defRPr>
+            </a:pPr>
+            <a:r>
+              <a:t>Defending the Landed Cost: A Real Example</a:t>
+            </a:r>
+          </a:p>
+        </p:txBody>
+      </p:sp>
+      <p:sp>
+        <p:nvSpPr>
+          <p:cNvPr id="5" name="TextBox 4"/>
           <p:cNvSpPr txBox="1"/>
           <p:nvPr/>
         </p:nvSpPr>
         <p:spPr>
           <a:xfrm>
-            <a:off x="731520" y="731520"/>
-            <a:ext cx="10698480" cy="548640"/>
+            <a:off x="731520" y="1298448"/>
+            <a:ext cx="10698480" cy="320040"/>
           </a:xfrm>
           <a:prstGeom prst="rect">
             <a:avLst/>
@@ -6094,42 +6270,6 @@
           <a:lstStyle/>
           <a:p>
             <a:pPr>
-              <a:defRPr sz="2200" b="1">
-                <a:solidFill>
-                  <a:srgbClr val="0F172A"/>
-                </a:solidFill>
-                <a:latin typeface="Segoe UI"/>
-              </a:defRPr>
-            </a:pPr>
-            <a:r>
-              <a:t>Physical BOM Mass Decomposition &amp; Landed Cost Preservation</a:t>
-            </a:r>
-          </a:p>
-        </p:txBody>
-      </p:sp>
-      <p:sp>
-        <p:nvSpPr>
-          <p:cNvPr id="5" name="TextBox 4"/>
-          <p:cNvSpPr txBox="1"/>
-          <p:nvPr/>
-        </p:nvSpPr>
-        <p:spPr>
-          <a:xfrm>
-            <a:off x="731520" y="1298448"/>
-            <a:ext cx="10698480" cy="365760"/>
-          </a:xfrm>
-          <a:prstGeom prst="rect">
-            <a:avLst/>
-          </a:prstGeom>
-          <a:noFill/>
-        </p:spPr>
-        <p:txBody>
-          <a:bodyPr wrap="square" lIns="0" tIns="0" rIns="0" bIns="0">
-            <a:spAutoFit/>
-          </a:bodyPr>
-          <a:lstStyle/>
-          <a:p>
-            <a:pPr>
               <a:defRPr sz="1100">
                 <a:solidFill>
                   <a:srgbClr val="64748B"/>
@@ -6138,7 +6278,7 @@
               </a:defRPr>
             </a:pPr>
             <a:r>
-              <a:t>Proving measurable consumer price defense on real-world products like Davidoff Espresso 57 Instant Glass Jar.</a:t>
+              <a:t>Tested on a real grocery staple: Davidoff Espresso 57 Instant Glass Jar (100g).</a:t>
             </a:r>
           </a:p>
         </p:txBody>
@@ -6151,8 +6291,77 @@
         </p:nvSpPr>
         <p:spPr>
           <a:xfrm>
-            <a:off x="731520" y="1783080"/>
-            <a:ext cx="6245352" cy="4480560"/>
+            <a:off x="722376" y="1956816"/>
+            <a:ext cx="6327648" cy="2921150"/>
+          </a:xfrm>
+          <a:prstGeom prst="roundRect">
+            <a:avLst/>
+          </a:prstGeom>
+          <a:solidFill>
+            <a:srgbClr val="FFFFFF"/>
+          </a:solidFill>
+          <a:ln w="19050">
+            <a:solidFill>
+              <a:srgbClr val="CBD5E1"/>
+            </a:solidFill>
+          </a:ln>
+        </p:spPr>
+        <p:style>
+          <a:lnRef idx="1">
+            <a:schemeClr val="accent1"/>
+          </a:lnRef>
+          <a:fillRef idx="3">
+            <a:schemeClr val="accent1"/>
+          </a:fillRef>
+          <a:effectRef idx="2">
+            <a:schemeClr val="accent1"/>
+          </a:effectRef>
+          <a:fontRef idx="minor">
+            <a:schemeClr val="lt1"/>
+          </a:fontRef>
+        </p:style>
+        <p:txBody>
+          <a:bodyPr rtlCol="0" anchor="ctr"/>
+          <a:lstStyle/>
+          <a:p>
+            <a:pPr algn="ctr"/>
+          </a:p>
+        </p:txBody>
+      </p:sp>
+      <p:pic>
+        <p:nvPicPr>
+          <p:cNvPr id="7" name="Picture 6" descr="02_physical_bom_cost_defense.png"/>
+          <p:cNvPicPr>
+            <a:picLocks noChangeAspect="1"/>
+          </p:cNvPicPr>
+          <p:nvPr/>
+        </p:nvPicPr>
+        <p:blipFill>
+          <a:blip r:embed="rId2"/>
+          <a:stretch>
+            <a:fillRect/>
+          </a:stretch>
+        </p:blipFill>
+        <p:spPr>
+          <a:xfrm>
+            <a:off x="777240" y="2011680"/>
+            <a:ext cx="6217920" cy="2811422"/>
+          </a:xfrm>
+          <a:prstGeom prst="rect">
+            <a:avLst/>
+          </a:prstGeom>
+        </p:spPr>
+      </p:pic>
+      <p:sp>
+        <p:nvSpPr>
+          <p:cNvPr id="8" name="Rounded Rectangle 7"/>
+          <p:cNvSpPr/>
+          <p:nvPr/>
+        </p:nvSpPr>
+        <p:spPr>
+          <a:xfrm>
+            <a:off x="7223760" y="1783080"/>
+            <a:ext cx="4206240" cy="4480560"/>
           </a:xfrm>
           <a:prstGeom prst="roundRect">
             <a:avLst/>
@@ -6188,75 +6397,6 @@
           </a:p>
         </p:txBody>
       </p:sp>
-      <p:pic>
-        <p:nvPicPr>
-          <p:cNvPr id="7" name="Picture 6" descr="02_physical_bom_cost_defense.png"/>
-          <p:cNvPicPr>
-            <a:picLocks noChangeAspect="1"/>
-          </p:cNvPicPr>
-          <p:nvPr/>
-        </p:nvPicPr>
-        <p:blipFill>
-          <a:blip r:embed="rId2"/>
-          <a:stretch>
-            <a:fillRect/>
-          </a:stretch>
-        </p:blipFill>
-        <p:spPr>
-          <a:xfrm>
-            <a:off x="822960" y="1874519"/>
-            <a:ext cx="6062472" cy="2741137"/>
-          </a:xfrm>
-          <a:prstGeom prst="rect">
-            <a:avLst/>
-          </a:prstGeom>
-        </p:spPr>
-      </p:pic>
-      <p:sp>
-        <p:nvSpPr>
-          <p:cNvPr id="8" name="Rounded Rectangle 7"/>
-          <p:cNvSpPr/>
-          <p:nvPr/>
-        </p:nvSpPr>
-        <p:spPr>
-          <a:xfrm>
-            <a:off x="7159752" y="1783080"/>
-            <a:ext cx="4297680" cy="4480560"/>
-          </a:xfrm>
-          <a:prstGeom prst="roundRect">
-            <a:avLst/>
-          </a:prstGeom>
-          <a:solidFill>
-            <a:srgbClr val="FFFFFF"/>
-          </a:solidFill>
-          <a:ln w="12700">
-            <a:solidFill>
-              <a:srgbClr val="E2E8F0"/>
-            </a:solidFill>
-          </a:ln>
-        </p:spPr>
-        <p:style>
-          <a:lnRef idx="1">
-            <a:schemeClr val="accent1"/>
-          </a:lnRef>
-          <a:fillRef idx="3">
-            <a:schemeClr val="accent1"/>
-          </a:fillRef>
-          <a:effectRef idx="2">
-            <a:schemeClr val="accent1"/>
-          </a:effectRef>
-          <a:fontRef idx="minor">
-            <a:schemeClr val="lt1"/>
-          </a:fontRef>
-        </p:style>
-        <p:txBody>
-          <a:bodyPr rtlCol="0" anchor="ctr"/>
-          <a:lstStyle/>
-          <a:p>
-            <a:pPr algn="ctr"/>
-          </a:p>
-        </p:txBody>
-      </p:sp>
       <p:sp>
         <p:nvSpPr>
           <p:cNvPr id="9" name="TextBox 8"/>
@@ -6265,8 +6405,8 @@
         </p:nvSpPr>
         <p:spPr>
           <a:xfrm>
-            <a:off x="7360920" y="1965960"/>
-            <a:ext cx="3886200" cy="4114800"/>
+            <a:off x="7452360" y="1965960"/>
+            <a:ext cx="3749039" cy="4114800"/>
           </a:xfrm>
           <a:prstGeom prst="rect">
             <a:avLst/>
@@ -6288,7 +6428,7 @@
               </a:defRPr>
             </a:pPr>
             <a:r>
-              <a:t>Empirical Value Preservation</a:t>
+              <a:t>The Real Numbers (Unit Cost):</a:t>
             </a:r>
           </a:p>
           <a:p>
@@ -6298,16 +6438,16 @@
               </a:spcBef>
             </a:pPr>
             <a:r>
-              <a:rPr sz="919" b="1">
+              <a:rPr sz="950" b="1">
                 <a:solidFill>
                   <a:srgbClr val="334155"/>
                 </a:solidFill>
                 <a:latin typeface="Segoe UI"/>
               </a:rPr>
-              <a:t>Pre-Crisis Baseline: </a:t>
-            </a:r>
-            <a:r>
-              <a:rPr sz="1050" b="1">
+              <a:t>Normal Base Cost: </a:t>
+            </a:r>
+            <a:r>
+              <a:rPr sz="1100" b="1">
                 <a:solidFill>
                   <a:srgbClr val="0F172A"/>
                 </a:solidFill>
@@ -6323,7 +6463,7 @@
                 </a:solidFill>
                 <a:latin typeface="Segoe UI"/>
               </a:rPr>
-              <a:t>Standard procurement before the maritime and energy shock.</a:t>
+              <a:t>Standard packaging cost before the shipping and gas shock.</a:t>
             </a:r>
           </a:p>
           <a:p>
@@ -6333,18 +6473,18 @@
               </a:spcBef>
             </a:pPr>
             <a:r>
-              <a:rPr sz="919" b="1">
+              <a:rPr sz="950" b="1">
                 <a:solidFill>
                   <a:srgbClr val="334155"/>
                 </a:solidFill>
                 <a:latin typeface="Segoe UI"/>
               </a:rPr>
-              <a:t>Unmitigated Shock Cost: </a:t>
-            </a:r>
-            <a:r>
-              <a:rPr sz="1050" b="1">
-                <a:solidFill>
-                  <a:srgbClr val="DB2777"/>
+              <a:t>Unmitigated Crisis Shock: </a:t>
+            </a:r>
+            <a:r>
+              <a:rPr sz="1100" b="1">
+                <a:solidFill>
+                  <a:srgbClr val="E11D48"/>
                 </a:solidFill>
                 <a:latin typeface="Segoe UI"/>
               </a:rPr>
@@ -6358,7 +6498,7 @@
                 </a:solidFill>
                 <a:latin typeface="Segoe UI"/>
               </a:rPr>
-              <a:t>+105.3% unhedged price surge driven by overseas freight delays and energy tariffs.</a:t>
+              <a:t>+105% cost spike! Double the packaging cost if you don't optimize.</a:t>
             </a:r>
           </a:p>
           <a:p>
@@ -6368,18 +6508,18 @@
               </a:spcBef>
             </a:pPr>
             <a:r>
-              <a:rPr sz="919" b="1">
+              <a:rPr sz="950" b="1">
                 <a:solidFill>
                   <a:srgbClr val="334155"/>
                 </a:solidFill>
                 <a:latin typeface="Segoe UI"/>
               </a:rPr>
-              <a:t>BasketShield Defended Cost: </a:t>
-            </a:r>
-            <a:r>
-              <a:rPr sz="1050" b="1">
-                <a:solidFill>
-                  <a:srgbClr val="059669"/>
+              <a:t>Defended with BasketShield: </a:t>
+            </a:r>
+            <a:r>
+              <a:rPr sz="1100" b="1">
+                <a:solidFill>
+                  <a:srgbClr val="0D9488"/>
                 </a:solidFill>
                 <a:latin typeface="Segoe UI"/>
               </a:rPr>
@@ -6393,7 +6533,7 @@
                 </a:solidFill>
                 <a:latin typeface="Segoe UI"/>
               </a:rPr>
-              <a:t>-79.8% cost reduction achieved by reallocating to domestic certified nearshore converters.</a:t>
+              <a:t>-79.8% cost saved by immediately shifting orders to domestic suppliers.</a:t>
             </a:r>
           </a:p>
           <a:p>
@@ -6403,22 +6543,22 @@
               </a:spcBef>
             </a:pPr>
             <a:r>
-              <a:rPr sz="919" b="1">
+              <a:rPr sz="950" b="1">
                 <a:solidFill>
                   <a:srgbClr val="334155"/>
                 </a:solidFill>
                 <a:latin typeface="Segoe UI"/>
               </a:rPr>
-              <a:t>Defended Retail Shelf MSRP: </a:t>
-            </a:r>
-            <a:r>
-              <a:rPr sz="1050" b="1">
-                <a:solidFill>
-                  <a:srgbClr val="059669"/>
+              <a:t>Supermarket Store Price: </a:t>
+            </a:r>
+            <a:r>
+              <a:rPr sz="1100" b="1">
+                <a:solidFill>
+                  <a:srgbClr val="0D9488"/>
                 </a:solidFill>
                 <a:latin typeface="Segoe UI"/>
               </a:rPr>
-              <a:t>$9.40 / unit
+              <a:t>$9.40 (Defended)
 </a:t>
             </a:r>
             <a:r>
@@ -6428,7 +6568,7 @@
                 </a:solidFill>
                 <a:latin typeface="Segoe UI"/>
               </a:rPr>
-              <a:t>-$0.97 inflationary consumer price spike absorbed, preventing supermarket basket price escalation.</a:t>
+              <a:t>Saves consumers $0.97 per jar! Keeps the price stable instead of jumping to $10.37.</a:t>
             </a:r>
           </a:p>
         </p:txBody>
@@ -6496,14 +6636,69 @@
       </p:sp>
       <p:sp>
         <p:nvSpPr>
-          <p:cNvPr id="3" name="TextBox 2"/>
+          <p:cNvPr id="3" name="Rounded Rectangle 2"/>
+          <p:cNvSpPr/>
+          <p:nvPr/>
+        </p:nvSpPr>
+        <p:spPr>
+          <a:xfrm>
+            <a:off x="731520" y="384048"/>
+            <a:ext cx="2926080" cy="292608"/>
+          </a:xfrm>
+          <a:prstGeom prst="roundRect">
+            <a:avLst/>
+          </a:prstGeom>
+          <a:solidFill>
+            <a:srgbClr val="EFF6FF"/>
+          </a:solidFill>
+          <a:ln w="12700">
+            <a:solidFill>
+              <a:srgbClr val="2563EB"/>
+            </a:solidFill>
+          </a:ln>
+        </p:spPr>
+        <p:style>
+          <a:lnRef idx="1">
+            <a:schemeClr val="accent1"/>
+          </a:lnRef>
+          <a:fillRef idx="3">
+            <a:schemeClr val="accent1"/>
+          </a:fillRef>
+          <a:effectRef idx="2">
+            <a:schemeClr val="accent1"/>
+          </a:effectRef>
+          <a:fontRef idx="minor">
+            <a:schemeClr val="lt1"/>
+          </a:fontRef>
+        </p:style>
+        <p:txBody>
+          <a:bodyPr rtlCol="0" anchor="ctr" lIns="0" tIns="0" rIns="0" bIns="0"/>
+          <a:lstStyle/>
+          <a:p>
+            <a:pPr algn="ctr">
+              <a:defRPr sz="850" b="1">
+                <a:solidFill>
+                  <a:srgbClr val="2563EB"/>
+                </a:solidFill>
+                <a:latin typeface="Segoe UI"/>
+              </a:defRPr>
+            </a:pPr>
+            <a:r>
+              <a:t>06. EXECUTIVE INSIGHTS</a:t>
+            </a:r>
+          </a:p>
+        </p:txBody>
+      </p:sp>
+      <p:sp>
+        <p:nvSpPr>
+          <p:cNvPr id="4" name="TextBox 3"/>
           <p:cNvSpPr txBox="1"/>
           <p:nvPr/>
         </p:nvSpPr>
         <p:spPr>
           <a:xfrm>
-            <a:off x="731520" y="411480"/>
-            <a:ext cx="10698480" cy="320040"/>
+            <a:off x="731520" y="749808"/>
+            <a:ext cx="10698480" cy="502920"/>
           </a:xfrm>
           <a:prstGeom prst="rect">
             <a:avLst/>
@@ -6517,29 +6712,29 @@
           <a:lstStyle/>
           <a:p>
             <a:pPr>
-              <a:defRPr sz="950" b="1">
-                <a:solidFill>
-                  <a:srgbClr val="2563EB"/>
-                </a:solidFill>
-                <a:latin typeface="Segoe UI"/>
-              </a:defRPr>
-            </a:pPr>
-            <a:r>
-              <a:t>06. MATHEMATICAL FORMULATION &amp; EXECUTIVE NARRATIVE</a:t>
-            </a:r>
-          </a:p>
-        </p:txBody>
-      </p:sp>
-      <p:sp>
-        <p:nvSpPr>
-          <p:cNvPr id="4" name="TextBox 3"/>
+              <a:defRPr sz="2100" b="1">
+                <a:solidFill>
+                  <a:srgbClr val="0F172A"/>
+                </a:solidFill>
+                <a:latin typeface="Segoe UI"/>
+              </a:defRPr>
+            </a:pPr>
+            <a:r>
+              <a:t>Explaining Complex Math in Plain English</a:t>
+            </a:r>
+          </a:p>
+        </p:txBody>
+      </p:sp>
+      <p:sp>
+        <p:nvSpPr>
+          <p:cNvPr id="5" name="TextBox 4"/>
           <p:cNvSpPr txBox="1"/>
           <p:nvPr/>
         </p:nvSpPr>
         <p:spPr>
           <a:xfrm>
-            <a:off x="731520" y="731520"/>
-            <a:ext cx="10698480" cy="548640"/>
+            <a:off x="731520" y="1298448"/>
+            <a:ext cx="10698480" cy="320040"/>
           </a:xfrm>
           <a:prstGeom prst="rect">
             <a:avLst/>
@@ -6553,42 +6748,6 @@
           <a:lstStyle/>
           <a:p>
             <a:pPr>
-              <a:defRPr sz="2200" b="1">
-                <a:solidFill>
-                  <a:srgbClr val="0F172A"/>
-                </a:solidFill>
-                <a:latin typeface="Segoe UI"/>
-              </a:defRPr>
-            </a:pPr>
-            <a:r>
-              <a:t>Mixed-Integer Programming (MILP) &amp; Plain-English Executive Briefing</a:t>
-            </a:r>
-          </a:p>
-        </p:txBody>
-      </p:sp>
-      <p:sp>
-        <p:nvSpPr>
-          <p:cNvPr id="5" name="TextBox 4"/>
-          <p:cNvSpPr txBox="1"/>
-          <p:nvPr/>
-        </p:nvSpPr>
-        <p:spPr>
-          <a:xfrm>
-            <a:off x="731520" y="1298448"/>
-            <a:ext cx="10698480" cy="365760"/>
-          </a:xfrm>
-          <a:prstGeom prst="rect">
-            <a:avLst/>
-          </a:prstGeom>
-          <a:noFill/>
-        </p:spPr>
-        <p:txBody>
-          <a:bodyPr wrap="square" lIns="0" tIns="0" rIns="0" bIns="0">
-            <a:spAutoFit/>
-          </a:bodyPr>
-          <a:lstStyle/>
-          <a:p>
-            <a:pPr>
               <a:defRPr sz="1100">
                 <a:solidFill>
                   <a:srgbClr val="64748B"/>
@@ -6597,7 +6756,7 @@
               </a:defRPr>
             </a:pPr>
             <a:r>
-              <a:t>Translating deterministic linear algebra proofs into actionable intelligence for non-technical leadership.</a:t>
+              <a:t>Managers don't want confusing equations—they want clear answers they can act on immediately.</a:t>
             </a:r>
           </a:p>
         </p:txBody>
@@ -6611,7 +6770,7 @@
         <p:spPr>
           <a:xfrm>
             <a:off x="731520" y="1783080"/>
-            <a:ext cx="5166360" cy="4480560"/>
+            <a:ext cx="4663440" cy="4480560"/>
           </a:xfrm>
           <a:prstGeom prst="roundRect">
             <a:avLst/>
@@ -6656,7 +6815,7 @@
         <p:spPr>
           <a:xfrm>
             <a:off x="960120" y="1965960"/>
-            <a:ext cx="4709160" cy="4114800"/>
+            <a:ext cx="4206240" cy="4114800"/>
           </a:xfrm>
           <a:prstGeom prst="rect">
             <a:avLst/>
@@ -6678,136 +6837,85 @@
               </a:defRPr>
             </a:pPr>
             <a:r>
-              <a:t>Mathematical Optimization Formulation (Google OR-Tools)</a:t>
+              <a:t>The 3 Questions Every Executive Asks:</a:t>
             </a:r>
           </a:p>
           <a:p>
             <a:pPr>
               <a:spcBef>
-                <a:spcPts val="600"/>
+                <a:spcPts val="1000"/>
               </a:spcBef>
             </a:pPr>
             <a:r>
-              <a:rPr sz="919" b="1">
+              <a:rPr sz="1000" b="1">
                 <a:solidFill>
                   <a:srgbClr val="2563EB"/>
                 </a:solidFill>
                 <a:latin typeface="Segoe UI"/>
               </a:rPr>
-              <a:t>Objective Function: </a:t>
-            </a:r>
-            <a:r>
-              <a:rPr sz="850">
+              <a:t>1. What Broke in the Supply Chain?
+</a:t>
+            </a:r>
+            <a:r>
+              <a:rPr sz="919">
                 <a:solidFill>
                   <a:srgbClr val="475569"/>
                 </a:solidFill>
                 <a:latin typeface="Segoe UI"/>
               </a:rPr>
-              <a:t>min sum [ C_landed,s * x_s + F_contract,s * y_s + lambda_L * L_s * x_s + lambda_C * E_s * x_s ]
-Minimizes total landed procurement cost, binary vendor activation fees, lead-time penalties, and carbon scope 3 emissions.</a:t>
+              <a:t>Shipping detours around Africa added 14 days of delays, and gas shortages spiked factory annealing costs for glass jars.</a:t>
             </a:r>
           </a:p>
           <a:p>
             <a:pPr>
               <a:spcBef>
-                <a:spcPts val="600"/>
+                <a:spcPts val="1000"/>
               </a:spcBef>
             </a:pPr>
             <a:r>
-              <a:rPr sz="919" b="1">
+              <a:rPr sz="1000" b="1">
                 <a:solidFill>
                   <a:srgbClr val="2563EB"/>
                 </a:solidFill>
                 <a:latin typeface="Segoe UI"/>
               </a:rPr>
-              <a:t>1. Strict Demand Conservation: </a:t>
-            </a:r>
-            <a:r>
-              <a:rPr sz="850">
+              <a:t>2. Why Would Shoppers Pay More?
+</a:t>
+            </a:r>
+            <a:r>
+              <a:rPr sz="919">
                 <a:solidFill>
                   <a:srgbClr val="475569"/>
                 </a:solidFill>
                 <a:latin typeface="Segoe UI"/>
               </a:rPr>
-              <a:t>sum(x_s) = D_total
-Guarantees zero under-delivery; 100% of required production volume is satisfied without stockouts.</a:t>
+              <a:t>Food companies only make a 35% margin. When jar costs jump $0.53, they pass that cost down, hiking grocery bills.</a:t>
             </a:r>
           </a:p>
           <a:p>
             <a:pPr>
               <a:spcBef>
-                <a:spcPts val="600"/>
+                <a:spcPts val="1000"/>
               </a:spcBef>
             </a:pPr>
             <a:r>
-              <a:rPr sz="919" b="1">
+              <a:rPr sz="1000" b="1">
                 <a:solidFill>
                   <a:srgbClr val="2563EB"/>
                 </a:solidFill>
                 <a:latin typeface="Segoe UI"/>
               </a:rPr>
-              <a:t>2. Big-M Binary Activation Gating: </a:t>
-            </a:r>
-            <a:r>
-              <a:rPr sz="850">
+              <a:t>3. How Did the Math Engine Fix It?
+</a:t>
+            </a:r>
+            <a:r>
+              <a:rPr sz="919">
                 <a:solidFill>
                   <a:srgbClr val="475569"/>
                 </a:solidFill>
                 <a:latin typeface="Segoe UI"/>
               </a:rPr>
-              <a:t>MOQ_s * y_s &lt;= x_s &lt;= Capacity_s * y_s
-Forces volume to zero if supplier is not activated (y_s = 0), and respects certified supplier production ceilings.</a:t>
-            </a:r>
-          </a:p>
-          <a:p>
-            <a:pPr>
-              <a:spcBef>
-                <a:spcPts val="600"/>
-              </a:spcBef>
-            </a:pPr>
-            <a:r>
-              <a:rPr sz="919" b="1">
-                <a:solidFill>
-                  <a:srgbClr val="2563EB"/>
-                </a:solidFill>
-                <a:latin typeface="Segoe UI"/>
-              </a:rPr>
-              <a:t>3. Certified Circular Scrap Fleet SLA: </a:t>
-            </a:r>
-            <a:r>
-              <a:rPr sz="850">
-                <a:solidFill>
-                  <a:srgbClr val="475569"/>
-                </a:solidFill>
-                <a:latin typeface="Segoe UI"/>
-              </a:rPr>
-              <a:t>sum(R_s * x_s) &gt;= R_target * D_total
-Enforces closed-loop post-consumer recycled content (e.g. 71.8% achieved in practice).</a:t>
-            </a:r>
-          </a:p>
-          <a:p>
-            <a:pPr>
-              <a:spcBef>
-                <a:spcPts val="600"/>
-              </a:spcBef>
-            </a:pPr>
-            <a:r>
-              <a:rPr sz="919" b="1">
-                <a:solidFill>
-                  <a:srgbClr val="2563EB"/>
-                </a:solidFill>
-                <a:latin typeface="Segoe UI"/>
-              </a:rPr>
-              <a:t>Computational Performance: </a:t>
-            </a:r>
-            <a:r>
-              <a:rPr sz="850">
-                <a:solidFill>
-                  <a:srgbClr val="475569"/>
-                </a:solidFill>
-                <a:latin typeface="Segoe UI"/>
-              </a:rPr>
-              <a:t>Evaluated deterministically in &lt;15ms with verified global optimality via the SCIP backend.</a:t>
+              <a:t>Within 15ms, the optimizer switched orders to pre-qualified local suppliers, avoiding canal penalties and keeping 72% recycled content!</a:t>
             </a:r>
           </a:p>
         </p:txBody>
@@ -6820,8 +6928,8 @@
         </p:nvSpPr>
         <p:spPr>
           <a:xfrm>
-            <a:off x="6080760" y="1783080"/>
-            <a:ext cx="5376672" cy="4480560"/>
+            <a:off x="5568696" y="1956816"/>
+            <a:ext cx="5916168" cy="2735100"/>
           </a:xfrm>
           <a:prstGeom prst="roundRect">
             <a:avLst/>
@@ -6829,9 +6937,9 @@
           <a:solidFill>
             <a:srgbClr val="FFFFFF"/>
           </a:solidFill>
-          <a:ln w="12700">
+          <a:ln w="19050">
             <a:solidFill>
-              <a:srgbClr val="E2E8F0"/>
+              <a:srgbClr val="CBD5E1"/>
             </a:solidFill>
           </a:ln>
         </p:spPr>
@@ -6873,14 +6981,111 @@
         </p:blipFill>
         <p:spPr>
           <a:xfrm>
-            <a:off x="6172200" y="1874519"/>
-            <a:ext cx="5193792" cy="2348365"/>
+            <a:off x="5623560" y="2011680"/>
+            <a:ext cx="5806440" cy="2625372"/>
           </a:xfrm>
           <a:prstGeom prst="rect">
             <a:avLst/>
           </a:prstGeom>
         </p:spPr>
       </p:pic>
+      <p:sp>
+        <p:nvSpPr>
+          <p:cNvPr id="10" name="Rounded Rectangle 9"/>
+          <p:cNvSpPr/>
+          <p:nvPr/>
+        </p:nvSpPr>
+        <p:spPr>
+          <a:xfrm>
+            <a:off x="5623560" y="4937760"/>
+            <a:ext cx="5916168" cy="1325880"/>
+          </a:xfrm>
+          <a:prstGeom prst="roundRect">
+            <a:avLst/>
+          </a:prstGeom>
+          <a:solidFill>
+            <a:srgbClr val="F8FAFC"/>
+          </a:solidFill>
+          <a:ln w="12700">
+            <a:solidFill>
+              <a:srgbClr val="E2E8F0"/>
+            </a:solidFill>
+          </a:ln>
+        </p:spPr>
+        <p:style>
+          <a:lnRef idx="1">
+            <a:schemeClr val="accent1"/>
+          </a:lnRef>
+          <a:fillRef idx="3">
+            <a:schemeClr val="accent1"/>
+          </a:fillRef>
+          <a:effectRef idx="2">
+            <a:schemeClr val="accent1"/>
+          </a:effectRef>
+          <a:fontRef idx="minor">
+            <a:schemeClr val="lt1"/>
+          </a:fontRef>
+        </p:style>
+        <p:txBody>
+          <a:bodyPr rtlCol="0" anchor="ctr"/>
+          <a:lstStyle/>
+          <a:p>
+            <a:pPr algn="ctr"/>
+          </a:p>
+        </p:txBody>
+      </p:sp>
+      <p:sp>
+        <p:nvSpPr>
+          <p:cNvPr id="11" name="TextBox 10"/>
+          <p:cNvSpPr txBox="1"/>
+          <p:nvPr/>
+        </p:nvSpPr>
+        <p:spPr>
+          <a:xfrm>
+            <a:off x="5806440" y="5029200"/>
+            <a:ext cx="5577840" cy="1143000"/>
+          </a:xfrm>
+          <a:prstGeom prst="rect">
+            <a:avLst/>
+          </a:prstGeom>
+          <a:noFill/>
+        </p:spPr>
+        <p:txBody>
+          <a:bodyPr wrap="square" lIns="0" tIns="0" rIns="0" bIns="0">
+            <a:spAutoFit/>
+          </a:bodyPr>
+          <a:lstStyle/>
+          <a:p>
+            <a:pPr>
+              <a:defRPr sz="1000" b="1">
+                <a:solidFill>
+                  <a:srgbClr val="0D9488"/>
+                </a:solidFill>
+                <a:latin typeface="Segoe UI"/>
+              </a:defRPr>
+            </a:pPr>
+            <a:r>
+              <a:t>🎯 Why Judges &amp; Executives Love This:</a:t>
+            </a:r>
+          </a:p>
+          <a:p>
+            <a:pPr>
+              <a:spcBef>
+                <a:spcPts val="300"/>
+              </a:spcBef>
+              <a:defRPr sz="919">
+                <a:solidFill>
+                  <a:srgbClr val="475569"/>
+                </a:solidFill>
+                <a:latin typeface="Segoe UI"/>
+              </a:defRPr>
+            </a:pPr>
+            <a:r>
+              <a:t>Instead of an opaque black-box AI or a generic dashboard, BasketShield delivers transparent mathematical proof alongside clear human explanations.</a:t>
+            </a:r>
+          </a:p>
+        </p:txBody>
+      </p:sp>
     </p:spTree>
   </p:cSld>
   <p:clrMapOvr>
@@ -6944,14 +7149,69 @@
       </p:sp>
       <p:sp>
         <p:nvSpPr>
-          <p:cNvPr id="3" name="TextBox 2"/>
+          <p:cNvPr id="3" name="Rounded Rectangle 2"/>
+          <p:cNvSpPr/>
+          <p:nvPr/>
+        </p:nvSpPr>
+        <p:spPr>
+          <a:xfrm>
+            <a:off x="731520" y="384048"/>
+            <a:ext cx="2926080" cy="292608"/>
+          </a:xfrm>
+          <a:prstGeom prst="roundRect">
+            <a:avLst/>
+          </a:prstGeom>
+          <a:solidFill>
+            <a:srgbClr val="EFF6FF"/>
+          </a:solidFill>
+          <a:ln w="12700">
+            <a:solidFill>
+              <a:srgbClr val="2563EB"/>
+            </a:solidFill>
+          </a:ln>
+        </p:spPr>
+        <p:style>
+          <a:lnRef idx="1">
+            <a:schemeClr val="accent1"/>
+          </a:lnRef>
+          <a:fillRef idx="3">
+            <a:schemeClr val="accent1"/>
+          </a:fillRef>
+          <a:effectRef idx="2">
+            <a:schemeClr val="accent1"/>
+          </a:effectRef>
+          <a:fontRef idx="minor">
+            <a:schemeClr val="lt1"/>
+          </a:fontRef>
+        </p:style>
+        <p:txBody>
+          <a:bodyPr rtlCol="0" anchor="ctr" lIns="0" tIns="0" rIns="0" bIns="0"/>
+          <a:lstStyle/>
+          <a:p>
+            <a:pPr algn="ctr">
+              <a:defRPr sz="850" b="1">
+                <a:solidFill>
+                  <a:srgbClr val="2563EB"/>
+                </a:solidFill>
+                <a:latin typeface="Segoe UI"/>
+              </a:defRPr>
+            </a:pPr>
+            <a:r>
+              <a:t>07. WRAP-UP &amp; TEAM</a:t>
+            </a:r>
+          </a:p>
+        </p:txBody>
+      </p:sp>
+      <p:sp>
+        <p:nvSpPr>
+          <p:cNvPr id="4" name="TextBox 3"/>
           <p:cNvSpPr txBox="1"/>
           <p:nvPr/>
         </p:nvSpPr>
         <p:spPr>
           <a:xfrm>
-            <a:off x="731520" y="411480"/>
-            <a:ext cx="10698480" cy="320040"/>
+            <a:off x="731520" y="749808"/>
+            <a:ext cx="10698480" cy="502920"/>
           </a:xfrm>
           <a:prstGeom prst="rect">
             <a:avLst/>
@@ -6965,29 +7225,29 @@
           <a:lstStyle/>
           <a:p>
             <a:pPr>
-              <a:defRPr sz="950" b="1">
-                <a:solidFill>
-                  <a:srgbClr val="2563EB"/>
-                </a:solidFill>
-                <a:latin typeface="Segoe UI"/>
-              </a:defRPr>
-            </a:pPr>
-            <a:r>
-              <a:t>07. PROJECT SUMMARY &amp; DELIVERABLES</a:t>
-            </a:r>
-          </a:p>
-        </p:txBody>
-      </p:sp>
-      <p:sp>
-        <p:nvSpPr>
-          <p:cNvPr id="4" name="TextBox 3"/>
+              <a:defRPr sz="2100" b="1">
+                <a:solidFill>
+                  <a:srgbClr val="0F172A"/>
+                </a:solidFill>
+                <a:latin typeface="Segoe UI"/>
+              </a:defRPr>
+            </a:pPr>
+            <a:r>
+              <a:t>Project Impact, Open Source &amp; Team Lazy</a:t>
+            </a:r>
+          </a:p>
+        </p:txBody>
+      </p:sp>
+      <p:sp>
+        <p:nvSpPr>
+          <p:cNvPr id="5" name="TextBox 4"/>
           <p:cNvSpPr txBox="1"/>
           <p:nvPr/>
         </p:nvSpPr>
         <p:spPr>
           <a:xfrm>
-            <a:off x="731520" y="731520"/>
-            <a:ext cx="10698480" cy="548640"/>
+            <a:off x="731520" y="1298448"/>
+            <a:ext cx="10698480" cy="320040"/>
           </a:xfrm>
           <a:prstGeom prst="rect">
             <a:avLst/>
@@ -7001,42 +7261,6 @@
           <a:lstStyle/>
           <a:p>
             <a:pPr>
-              <a:defRPr sz="2200" b="1">
-                <a:solidFill>
-                  <a:srgbClr val="0F172A"/>
-                </a:solidFill>
-                <a:latin typeface="Segoe UI"/>
-              </a:defRPr>
-            </a:pPr>
-            <a:r>
-              <a:t>Empirical Benchmarks, Open-Source Deliverables &amp; Team Lazy</a:t>
-            </a:r>
-          </a:p>
-        </p:txBody>
-      </p:sp>
-      <p:sp>
-        <p:nvSpPr>
-          <p:cNvPr id="5" name="TextBox 4"/>
-          <p:cNvSpPr txBox="1"/>
-          <p:nvPr/>
-        </p:nvSpPr>
-        <p:spPr>
-          <a:xfrm>
-            <a:off x="731520" y="1298448"/>
-            <a:ext cx="10698480" cy="365760"/>
-          </a:xfrm>
-          <a:prstGeom prst="rect">
-            <a:avLst/>
-          </a:prstGeom>
-          <a:noFill/>
-        </p:spPr>
-        <p:txBody>
-          <a:bodyPr wrap="square" lIns="0" tIns="0" rIns="0" bIns="0">
-            <a:spAutoFit/>
-          </a:bodyPr>
-          <a:lstStyle/>
-          <a:p>
-            <a:pPr>
               <a:defRPr sz="1100">
                 <a:solidFill>
                   <a:srgbClr val="64748B"/>
@@ -7045,7 +7269,7 @@
               </a:defRPr>
             </a:pPr>
             <a:r>
-              <a:t>A complete, battle-tested decision platform protecting enterprise margins and household grocery budgets.</a:t>
+              <a:t>Everything built in this project is verified, open-source, and ready to deploy.</a:t>
             </a:r>
           </a:p>
         </p:txBody>
@@ -7104,13 +7328,13 @@
         <p:spPr>
           <a:xfrm>
             <a:off x="914400" y="1965960"/>
-            <a:ext cx="3044952" cy="411480"/>
+            <a:ext cx="3044952" cy="384048"/>
           </a:xfrm>
           <a:prstGeom prst="roundRect">
             <a:avLst/>
           </a:prstGeom>
           <a:solidFill>
-            <a:srgbClr val="EFF6FF"/>
+            <a:srgbClr val="F8FAFC"/>
           </a:solidFill>
           <a:ln w="12700">
             <a:solidFill>
@@ -7145,7 +7369,7 @@
               </a:defRPr>
             </a:pPr>
             <a:r>
-              <a:t>VERIFIED BENCHMARKS</a:t>
+              <a:t>MEASURABLE RESULTS</a:t>
             </a:r>
           </a:p>
         </p:txBody>
@@ -7158,7 +7382,7 @@
         </p:nvSpPr>
         <p:spPr>
           <a:xfrm>
-            <a:off x="914400" y="2514600"/>
+            <a:off x="914400" y="2468880"/>
             <a:ext cx="3044952" cy="3566160"/>
           </a:xfrm>
           <a:prstGeom prst="rect">
@@ -7181,7 +7405,7 @@
               </a:defRPr>
             </a:pPr>
             <a:r>
-              <a:t>Empirical Performance</a:t>
+              <a:t>⚡ Proven Performance</a:t>
             </a:r>
           </a:p>
           <a:p>
@@ -7197,17 +7421,17 @@
               </a:defRPr>
             </a:pPr>
             <a:r>
-              <a:t>• Sub-15ms Solve Time: Real-time mathematical optimization replaces 4-week manual negotiation cycles.</a:t>
+              <a:t>• Sub-15ms Solve Time: Runs live in the browser without freezing.</a:t>
             </a:r>
             <a:br/>
             <a:br/>
             <a:r>
-              <a:t>• 65%–85% Inflation Defense: Proved absorption of compounding maritime and memory component cost spikes.</a:t>
+              <a:t>• Up to 85% Price Shock Absorbed: Defends unit costs across 6,000 products.</a:t>
             </a:r>
             <a:br/>
             <a:br/>
             <a:r>
-              <a:t>• 100% Test Suite Coverage: 5 comprehensive automated test suites verifying catalog integrity, LLM fallbacks, and boundary constraints.</a:t>
+              <a:t>• 100% Automated Test Pass: All edge cases and boundary tests verified.</a:t>
             </a:r>
           </a:p>
         </p:txBody>
@@ -7266,13 +7490,13 @@
         <p:spPr>
           <a:xfrm>
             <a:off x="4572000" y="1965960"/>
-            <a:ext cx="3044952" cy="411480"/>
+            <a:ext cx="3044952" cy="384048"/>
           </a:xfrm>
           <a:prstGeom prst="roundRect">
             <a:avLst/>
           </a:prstGeom>
           <a:solidFill>
-            <a:srgbClr val="EFF6FF"/>
+            <a:srgbClr val="F8FAFC"/>
           </a:solidFill>
           <a:ln w="12700">
             <a:solidFill>
@@ -7307,7 +7531,7 @@
               </a:defRPr>
             </a:pPr>
             <a:r>
-              <a:t>AUDIT-READY ARTIFACTS</a:t>
+              <a:t>AUDIT-READY DELIVERABLES</a:t>
             </a:r>
           </a:p>
         </p:txBody>
@@ -7320,7 +7544,7 @@
         </p:nvSpPr>
         <p:spPr>
           <a:xfrm>
-            <a:off x="4572000" y="2514600"/>
+            <a:off x="4572000" y="2468880"/>
             <a:ext cx="3044952" cy="3566160"/>
           </a:xfrm>
           <a:prstGeom prst="rect">
@@ -7343,7 +7567,7 @@
               </a:defRPr>
             </a:pPr>
             <a:r>
-              <a:t>Complete Deliverables</a:t>
+              <a:t>📦 Complete Open Source</a:t>
             </a:r>
           </a:p>
           <a:p>
@@ -7359,25 +7583,17 @@
               </a:defRPr>
             </a:pPr>
             <a:r>
-              <a:t>• Live Streamlit Platform: 4 dedicated workspaces (Cockpit, Provisional Cost Board, Commons, Formulations).</a:t>
+              <a:t>• Live Streamlit Cockpit: 4 clean pages, dark-mode shadcn/ui design.</a:t>
             </a:r>
             <a:br/>
             <a:br/>
             <a:r>
-              <a:t>• Publication Research Paper: Peer-audited whitepaper by Shrey Jaiswal cited across UNCTAD, TrendForce &amp; EPO.</a:t>
+              <a:t>• Peer-Audited Research Paper: Full PDF whitepaper included.</a:t>
             </a:r>
             <a:br/>
             <a:br/>
             <a:r>
-              <a:t>• Open-Source GitHub Repository:</a:t>
-            </a:r>
-            <a:br/>
-            <a:r>
-              <a:t>github.com/lazyshrey/basketshield</a:t>
-            </a:r>
-            <a:br/>
-            <a:r>
-              <a:t>Complete commit milestones &amp; docs.</a:t>
+              <a:t>• GitHub Repository: Clean 8-commit conventional history at github.com/lazyshrey/basketshield.</a:t>
             </a:r>
           </a:p>
         </p:txBody>
@@ -7436,17 +7652,17 @@
         <p:spPr>
           <a:xfrm>
             <a:off x="8229600" y="1965960"/>
-            <a:ext cx="3044952" cy="411480"/>
+            <a:ext cx="3044952" cy="384048"/>
           </a:xfrm>
           <a:prstGeom prst="roundRect">
             <a:avLst/>
           </a:prstGeom>
           <a:solidFill>
-            <a:srgbClr val="ECFDF5"/>
+            <a:srgbClr val="F8FAFC"/>
           </a:solidFill>
           <a:ln w="12700">
             <a:solidFill>
-              <a:srgbClr val="059669"/>
+              <a:srgbClr val="0D9488"/>
             </a:solidFill>
           </a:ln>
         </p:spPr>
@@ -7471,13 +7687,13 @@
             <a:pPr algn="ctr">
               <a:defRPr sz="950" b="1">
                 <a:solidFill>
-                  <a:srgbClr val="059669"/>
-                </a:solidFill>
-                <a:latin typeface="Segoe UI"/>
-              </a:defRPr>
-            </a:pPr>
-            <a:r>
-              <a:t>CREATORS &amp; ATTRIBUTION</a:t>
+                  <a:srgbClr val="0D9488"/>
+                </a:solidFill>
+                <a:latin typeface="Segoe UI"/>
+              </a:defRPr>
+            </a:pPr>
+            <a:r>
+              <a:t>PROJECT CREATORS</a:t>
             </a:r>
           </a:p>
         </p:txBody>
@@ -7490,7 +7706,7 @@
         </p:nvSpPr>
         <p:spPr>
           <a:xfrm>
-            <a:off x="8229600" y="2514600"/>
+            <a:off x="8229600" y="2468880"/>
             <a:ext cx="3044952" cy="3566160"/>
           </a:xfrm>
           <a:prstGeom prst="rect">
@@ -7513,7 +7729,7 @@
               </a:defRPr>
             </a:pPr>
             <a:r>
-              <a:t>Team Lazy</a:t>
+              <a:t>👥 Team Lazy</a:t>
             </a:r>
           </a:p>
           <a:p>
@@ -7547,24 +7763,20 @@
             <a:br/>
             <a:br/>
             <a:r>
-              <a:t>• Tech Stack:</a:t>
+              <a:t>• Built With:</a:t>
             </a:r>
             <a:br/>
             <a:r>
-              <a:t>  Python 3.13, Google OR-Tools (SCIP),</a:t>
+              <a:t>  Python, Google OR-Tools, Gemini AI,</a:t>
             </a:r>
             <a:br/>
             <a:r>
-              <a:t>  Google Gemini API, Streamlit, Plotly,</a:t>
-            </a:r>
-            <a:br/>
-            <a:r>
-              <a:t>  ReportLab &amp; python-pptx.</a:t>
+              <a:t>  Streamlit, Plotly &amp; python-pptx.</a:t>
             </a:r>
             <a:br/>
             <a:br/>
             <a:r>
-              <a:t>• License: Open-Source MIT License.</a:t>
+              <a:t>• License: Open Source (MIT)</a:t>
             </a:r>
           </a:p>
         </p:txBody>
